--- a/01_ML.pptx
+++ b/01_ML.pptx
@@ -5,10 +5,10 @@
     <p:sldMasterId id="2147483660" r:id="rId1"/>
   </p:sldMasterIdLst>
   <p:notesMasterIdLst>
-    <p:notesMasterId r:id="rId9"/>
+    <p:notesMasterId r:id="rId11"/>
   </p:notesMasterIdLst>
   <p:handoutMasterIdLst>
-    <p:handoutMasterId r:id="rId10"/>
+    <p:handoutMasterId r:id="rId12"/>
   </p:handoutMasterIdLst>
   <p:sldIdLst>
     <p:sldId id="256" r:id="rId2"/>
@@ -18,6 +18,8 @@
     <p:sldId id="1142" r:id="rId6"/>
     <p:sldId id="1141" r:id="rId7"/>
     <p:sldId id="1143" r:id="rId8"/>
+    <p:sldId id="1144" r:id="rId9"/>
+    <p:sldId id="1145" r:id="rId10"/>
   </p:sldIdLst>
   <p:sldSz cx="12192000" cy="6858000"/>
   <p:notesSz cx="6858000" cy="9144000"/>
@@ -132,6 +134,8 @@
             <p14:sldId id="1142"/>
             <p14:sldId id="1141"/>
             <p14:sldId id="1143"/>
+            <p14:sldId id="1144"/>
+            <p14:sldId id="1145"/>
           </p14:sldIdLst>
         </p14:section>
         <p14:section name="자세한 정보" id="{2CC34DB2-6590-42C0-AD4B-A04C6060184E}">
@@ -4437,14 +4441,14 @@
                         <a:buNone/>
                       </a:pPr>
                       <a:r>
-                        <a:rPr lang="en-US" altLang="ko-KR" sz="1600" u="none" strike="noStrike">
+                        <a:rPr lang="en-US" altLang="ko-KR" sz="1600" u="none" strike="noStrike" dirty="0">
                           <a:effectLst/>
                           <a:latin typeface="D2Coding" panose="020B0609020101020101" pitchFamily="49" charset="-127"/>
                           <a:ea typeface="D2Coding" panose="020B0609020101020101" pitchFamily="49" charset="-127"/>
                         </a:rPr>
                         <a:t>150</a:t>
                       </a:r>
-                      <a:endParaRPr lang="en-US" altLang="ko-KR" sz="1600" b="0" i="0" u="none" strike="noStrike">
+                      <a:endParaRPr lang="en-US" altLang="ko-KR" sz="1600" b="0" i="0" u="none" strike="noStrike" dirty="0">
                         <a:solidFill>
                           <a:srgbClr val="000000"/>
                         </a:solidFill>
@@ -4834,12 +4838,12 @@
                         <a:buNone/>
                       </a:pPr>
                       <a:r>
-                        <a:rPr lang="en-US" sz="1600" u="none" strike="noStrike">
+                        <a:rPr lang="en-US" sz="1600" u="none" strike="noStrike" dirty="0">
                           <a:effectLst/>
                         </a:rPr>
                         <a:t>height (feet)</a:t>
                       </a:r>
-                      <a:endParaRPr lang="en-US" sz="1600" b="1" i="0" u="none" strike="noStrike">
+                      <a:endParaRPr lang="en-US" sz="1600" b="1" i="0" u="none" strike="noStrike" dirty="0">
                         <a:solidFill>
                           <a:srgbClr val="FFFFFF"/>
                         </a:solidFill>
@@ -4967,12 +4971,12 @@
                         <a:buNone/>
                       </a:pPr>
                       <a:r>
-                        <a:rPr lang="en-US" altLang="ko-KR" sz="1600" u="none" strike="noStrike">
+                        <a:rPr lang="en-US" altLang="ko-KR" sz="1600" u="none" strike="noStrike" dirty="0">
                           <a:effectLst/>
                         </a:rPr>
                         <a:t>6</a:t>
                       </a:r>
-                      <a:endParaRPr lang="en-US" altLang="ko-KR" sz="1600" b="1" i="0" u="none" strike="noStrike">
+                      <a:endParaRPr lang="en-US" altLang="ko-KR" sz="1600" b="1" i="0" u="none" strike="noStrike" dirty="0">
                         <a:solidFill>
                           <a:srgbClr val="000000"/>
                         </a:solidFill>
@@ -7293,6 +7297,2207 @@
       <p:bldP spid="5" grpId="0" animBg="1"/>
     </p:bldLst>
   </p:timing>
+</p:sld>
+</file>
+
+<file path=ppt/slides/slide8.xml><?xml version="1.0" encoding="utf-8"?>
+<p:sld xmlns:a="http://schemas.openxmlformats.org/drawingml/2006/main" xmlns:r="http://schemas.openxmlformats.org/officeDocument/2006/relationships" xmlns:p="http://schemas.openxmlformats.org/presentationml/2006/main">
+  <p:cSld>
+    <p:spTree>
+      <p:nvGrpSpPr>
+        <p:cNvPr id="1" name="">
+          <a:extLst>
+            <a:ext uri="{FF2B5EF4-FFF2-40B4-BE49-F238E27FC236}">
+              <a16:creationId xmlns:a16="http://schemas.microsoft.com/office/drawing/2014/main" id="{29FC909A-4BF1-77B2-E911-0B847032A12D}"/>
+            </a:ext>
+          </a:extLst>
+        </p:cNvPr>
+        <p:cNvGrpSpPr/>
+        <p:nvPr/>
+      </p:nvGrpSpPr>
+      <p:grpSpPr>
+        <a:xfrm>
+          <a:off x="0" y="0"/>
+          <a:ext cx="0" cy="0"/>
+          <a:chOff x="0" y="0"/>
+          <a:chExt cx="0" cy="0"/>
+        </a:xfrm>
+      </p:grpSpPr>
+      <p:sp>
+        <p:nvSpPr>
+          <p:cNvPr id="4" name="슬라이드 번호 개체 틀 3">
+            <a:extLst>
+              <a:ext uri="{FF2B5EF4-FFF2-40B4-BE49-F238E27FC236}">
+                <a16:creationId xmlns:a16="http://schemas.microsoft.com/office/drawing/2014/main" id="{2E8D2617-BBD3-EFD0-4C71-284E796FB845}"/>
+              </a:ext>
+            </a:extLst>
+          </p:cNvPr>
+          <p:cNvSpPr>
+            <a:spLocks noGrp="1"/>
+          </p:cNvSpPr>
+          <p:nvPr>
+            <p:ph type="sldNum" sz="quarter" idx="12"/>
+          </p:nvPr>
+        </p:nvSpPr>
+        <p:spPr>
+          <a:xfrm>
+            <a:off x="10514011" y="6036261"/>
+            <a:ext cx="753545" cy="365125"/>
+          </a:xfrm>
+        </p:spPr>
+        <p:txBody>
+          <a:bodyPr/>
+          <a:lstStyle/>
+          <a:p>
+            <a:fld id="{D57F1E4F-1CFF-5643-939E-217C01CDF565}" type="slidenum">
+              <a:rPr lang="en-US" smtClean="0"/>
+              <a:pPr/>
+              <a:t>8</a:t>
+            </a:fld>
+            <a:endParaRPr lang="en-US" dirty="0"/>
+          </a:p>
+        </p:txBody>
+      </p:sp>
+      <p:sp>
+        <p:nvSpPr>
+          <p:cNvPr id="3" name="제목 1">
+            <a:extLst>
+              <a:ext uri="{FF2B5EF4-FFF2-40B4-BE49-F238E27FC236}">
+                <a16:creationId xmlns:a16="http://schemas.microsoft.com/office/drawing/2014/main" id="{CDC2D4C1-A45A-C38C-1734-7F0CEADE5062}"/>
+              </a:ext>
+            </a:extLst>
+          </p:cNvPr>
+          <p:cNvSpPr txBox="1">
+            <a:spLocks/>
+          </p:cNvSpPr>
+          <p:nvPr/>
+        </p:nvSpPr>
+        <p:spPr>
+          <a:xfrm>
+            <a:off x="475645" y="481983"/>
+            <a:ext cx="10353762" cy="766439"/>
+          </a:xfrm>
+          <a:prstGeom prst="rect">
+            <a:avLst/>
+          </a:prstGeom>
+        </p:spPr>
+        <p:txBody>
+          <a:bodyPr vert="horz" lIns="91440" tIns="45720" rIns="91440" bIns="45720" rtlCol="0" anchor="ctr">
+            <a:normAutofit/>
+          </a:bodyPr>
+          <a:lstStyle>
+            <a:lvl1pPr algn="ctr" defTabSz="914400" rtl="0" eaLnBrk="1" latinLnBrk="1" hangingPunct="1">
+              <a:lnSpc>
+                <a:spcPct val="90000"/>
+              </a:lnSpc>
+              <a:spcBef>
+                <a:spcPct val="0"/>
+              </a:spcBef>
+              <a:buNone/>
+              <a:defRPr sz="3200" kern="1200" cap="all" baseline="0">
+                <a:solidFill>
+                  <a:schemeClr val="tx1"/>
+                </a:solidFill>
+                <a:effectLst/>
+                <a:latin typeface="Batang" panose="02030600000101010101" pitchFamily="18" charset="-127"/>
+                <a:ea typeface="Batang" panose="02030600000101010101" pitchFamily="18" charset="-127"/>
+                <a:cs typeface="+mj-cs"/>
+              </a:defRPr>
+            </a:lvl1pPr>
+          </a:lstStyle>
+          <a:p>
+            <a:pPr algn="l"/>
+            <a:r>
+              <a:rPr lang="en-US" altLang="ko-KR" sz="2800" cap="none" dirty="0">
+                <a:solidFill>
+                  <a:schemeClr val="bg2">
+                    <a:lumMod val="25000"/>
+                  </a:schemeClr>
+                </a:solidFill>
+                <a:latin typeface="D2Coding" panose="020B0609020101020101" pitchFamily="49" charset="-127"/>
+                <a:ea typeface="D2Coding" panose="020B0609020101020101" pitchFamily="49" charset="-127"/>
+                <a:cs typeface="Segoe UI Light" panose="020B0502040204020203" pitchFamily="34" charset="0"/>
+              </a:rPr>
+              <a:t>Task 4</a:t>
+            </a:r>
+            <a:endParaRPr lang="ko-KR" altLang="en-US" sz="2800" cap="none" dirty="0">
+              <a:solidFill>
+                <a:schemeClr val="bg2">
+                  <a:lumMod val="25000"/>
+                </a:schemeClr>
+              </a:solidFill>
+              <a:latin typeface="D2Coding" panose="020B0609020101020101" pitchFamily="49" charset="-127"/>
+              <a:ea typeface="D2Coding" panose="020B0609020101020101" pitchFamily="49" charset="-127"/>
+              <a:cs typeface="Segoe UI Light" panose="020B0502040204020203" pitchFamily="34" charset="0"/>
+            </a:endParaRPr>
+          </a:p>
+        </p:txBody>
+      </p:sp>
+      <p:sp>
+        <p:nvSpPr>
+          <p:cNvPr id="5" name="TextBox 4">
+            <a:extLst>
+              <a:ext uri="{FF2B5EF4-FFF2-40B4-BE49-F238E27FC236}">
+                <a16:creationId xmlns:a16="http://schemas.microsoft.com/office/drawing/2014/main" id="{7344B487-673F-6E37-E55A-E82DA4738A5C}"/>
+              </a:ext>
+            </a:extLst>
+          </p:cNvPr>
+          <p:cNvSpPr txBox="1"/>
+          <p:nvPr/>
+        </p:nvSpPr>
+        <p:spPr>
+          <a:xfrm>
+            <a:off x="682483" y="1265622"/>
+            <a:ext cx="11159285" cy="1531830"/>
+          </a:xfrm>
+          <a:prstGeom prst="rect">
+            <a:avLst/>
+          </a:prstGeom>
+          <a:noFill/>
+        </p:spPr>
+        <p:txBody>
+          <a:bodyPr wrap="square" rtlCol="0">
+            <a:spAutoFit/>
+          </a:bodyPr>
+          <a:lstStyle/>
+          <a:p>
+            <a:pPr marL="342900" indent="-342900">
+              <a:lnSpc>
+                <a:spcPct val="150000"/>
+              </a:lnSpc>
+              <a:buFont typeface="+mj-lt"/>
+              <a:buAutoNum type="arabicPeriod"/>
+            </a:pPr>
+            <a:r>
+              <a:rPr lang="en-US" altLang="ko-KR" sz="1600" dirty="0">
+                <a:latin typeface="D2Coding" panose="020B0609020101020101" pitchFamily="49" charset="-127"/>
+                <a:ea typeface="D2Coding" panose="020B0609020101020101" pitchFamily="49" charset="-127"/>
+              </a:rPr>
+              <a:t>height</a:t>
+            </a:r>
+            <a:r>
+              <a:rPr lang="ko-KR" altLang="en-US" sz="1600" dirty="0">
+                <a:latin typeface="D2Coding" panose="020B0609020101020101" pitchFamily="49" charset="-127"/>
+                <a:ea typeface="D2Coding" panose="020B0609020101020101" pitchFamily="49" charset="-127"/>
+              </a:rPr>
+              <a:t>와 </a:t>
+            </a:r>
+            <a:r>
+              <a:rPr lang="en-US" altLang="ko-KR" sz="1600" dirty="0">
+                <a:latin typeface="D2Coding" panose="020B0609020101020101" pitchFamily="49" charset="-127"/>
+                <a:ea typeface="D2Coding" panose="020B0609020101020101" pitchFamily="49" charset="-127"/>
+              </a:rPr>
+              <a:t>weight</a:t>
+            </a:r>
+            <a:r>
+              <a:rPr lang="ko-KR" altLang="en-US" sz="1600" dirty="0">
+                <a:latin typeface="D2Coding" panose="020B0609020101020101" pitchFamily="49" charset="-127"/>
+                <a:ea typeface="D2Coding" panose="020B0609020101020101" pitchFamily="49" charset="-127"/>
+              </a:rPr>
+              <a:t> 정보가 없다면 </a:t>
+            </a:r>
+            <a:r>
+              <a:rPr lang="en-US" altLang="ko-KR" sz="1600" dirty="0">
+                <a:latin typeface="D2Coding" panose="020B0609020101020101" pitchFamily="49" charset="-127"/>
+                <a:ea typeface="D2Coding" panose="020B0609020101020101" pitchFamily="49" charset="-127"/>
+              </a:rPr>
+              <a:t>sample </a:t>
+            </a:r>
+            <a:r>
+              <a:rPr lang="ko-KR" altLang="en-US" sz="1600" dirty="0">
+                <a:latin typeface="D2Coding" panose="020B0609020101020101" pitchFamily="49" charset="-127"/>
+                <a:ea typeface="D2Coding" panose="020B0609020101020101" pitchFamily="49" charset="-127"/>
+              </a:rPr>
+              <a:t>데이터의 </a:t>
+            </a:r>
+            <a:r>
+              <a:rPr lang="en-US" altLang="ko-KR" sz="1600" dirty="0">
+                <a:latin typeface="D2Coding" panose="020B0609020101020101" pitchFamily="49" charset="-127"/>
+                <a:ea typeface="D2Coding" panose="020B0609020101020101" pitchFamily="49" charset="-127"/>
+              </a:rPr>
+              <a:t>Gender ?</a:t>
+            </a:r>
+          </a:p>
+          <a:p>
+            <a:pPr marL="342900" indent="-342900">
+              <a:lnSpc>
+                <a:spcPct val="150000"/>
+              </a:lnSpc>
+              <a:buFont typeface="+mj-lt"/>
+              <a:buAutoNum type="arabicPeriod"/>
+            </a:pPr>
+            <a:r>
+              <a:rPr lang="en-US" altLang="ko-KR" sz="1600" dirty="0">
+                <a:latin typeface="D2Coding" panose="020B0609020101020101" pitchFamily="49" charset="-127"/>
+                <a:ea typeface="D2Coding" panose="020B0609020101020101" pitchFamily="49" charset="-127"/>
+              </a:rPr>
+              <a:t>height</a:t>
+            </a:r>
+            <a:r>
+              <a:rPr lang="ko-KR" altLang="en-US" sz="1600" dirty="0">
+                <a:latin typeface="D2Coding" panose="020B0609020101020101" pitchFamily="49" charset="-127"/>
+                <a:ea typeface="D2Coding" panose="020B0609020101020101" pitchFamily="49" charset="-127"/>
+              </a:rPr>
+              <a:t>와 </a:t>
+            </a:r>
+            <a:r>
+              <a:rPr lang="en-US" altLang="ko-KR" sz="1600" dirty="0">
+                <a:latin typeface="D2Coding" panose="020B0609020101020101" pitchFamily="49" charset="-127"/>
+                <a:ea typeface="D2Coding" panose="020B0609020101020101" pitchFamily="49" charset="-127"/>
+              </a:rPr>
+              <a:t>weight</a:t>
+            </a:r>
+            <a:r>
+              <a:rPr lang="ko-KR" altLang="en-US" sz="1600" dirty="0">
+                <a:latin typeface="D2Coding" panose="020B0609020101020101" pitchFamily="49" charset="-127"/>
+                <a:ea typeface="D2Coding" panose="020B0609020101020101" pitchFamily="49" charset="-127"/>
+              </a:rPr>
+              <a:t> 정보를</a:t>
+            </a:r>
+            <a:r>
+              <a:rPr lang="en-US" altLang="ko-KR" sz="1600" dirty="0">
+                <a:latin typeface="D2Coding" panose="020B0609020101020101" pitchFamily="49" charset="-127"/>
+                <a:ea typeface="D2Coding" panose="020B0609020101020101" pitchFamily="49" charset="-127"/>
+              </a:rPr>
+              <a:t> </a:t>
+            </a:r>
+            <a:r>
+              <a:rPr lang="ko-KR" altLang="en-US" sz="1600" dirty="0">
+                <a:latin typeface="D2Coding" panose="020B0609020101020101" pitchFamily="49" charset="-127"/>
+                <a:ea typeface="D2Coding" panose="020B0609020101020101" pitchFamily="49" charset="-127"/>
+              </a:rPr>
+              <a:t>바탕으로 </a:t>
+            </a:r>
+            <a:r>
+              <a:rPr lang="en-US" altLang="ko-KR" sz="1600" dirty="0">
+                <a:latin typeface="D2Coding" panose="020B0609020101020101" pitchFamily="49" charset="-127"/>
+                <a:ea typeface="D2Coding" panose="020B0609020101020101" pitchFamily="49" charset="-127"/>
+              </a:rPr>
+              <a:t>sample </a:t>
+            </a:r>
+            <a:r>
+              <a:rPr lang="ko-KR" altLang="en-US" sz="1600" dirty="0">
+                <a:latin typeface="D2Coding" panose="020B0609020101020101" pitchFamily="49" charset="-127"/>
+                <a:ea typeface="D2Coding" panose="020B0609020101020101" pitchFamily="49" charset="-127"/>
+              </a:rPr>
+              <a:t>데이터의 </a:t>
+            </a:r>
+            <a:r>
+              <a:rPr lang="en-US" altLang="ko-KR" sz="1600" dirty="0">
+                <a:latin typeface="D2Coding" panose="020B0609020101020101" pitchFamily="49" charset="-127"/>
+                <a:ea typeface="D2Coding" panose="020B0609020101020101" pitchFamily="49" charset="-127"/>
+              </a:rPr>
+              <a:t>Gender ?</a:t>
+            </a:r>
+          </a:p>
+          <a:p>
+            <a:pPr marL="342900" indent="-342900">
+              <a:lnSpc>
+                <a:spcPct val="150000"/>
+              </a:lnSpc>
+              <a:buFont typeface="+mj-lt"/>
+              <a:buAutoNum type="arabicPeriod"/>
+            </a:pPr>
+            <a:r>
+              <a:rPr lang="en-US" altLang="ko-KR" sz="1600" dirty="0">
+                <a:latin typeface="D2Coding" panose="020B0609020101020101" pitchFamily="49" charset="-127"/>
+                <a:ea typeface="D2Coding" panose="020B0609020101020101" pitchFamily="49" charset="-127"/>
+              </a:rPr>
+              <a:t>height</a:t>
+            </a:r>
+            <a:r>
+              <a:rPr lang="ko-KR" altLang="en-US" sz="1600" dirty="0">
+                <a:latin typeface="D2Coding" panose="020B0609020101020101" pitchFamily="49" charset="-127"/>
+                <a:ea typeface="D2Coding" panose="020B0609020101020101" pitchFamily="49" charset="-127"/>
+              </a:rPr>
+              <a:t>와 </a:t>
+            </a:r>
+            <a:r>
+              <a:rPr lang="en-US" altLang="ko-KR" sz="1600" dirty="0">
+                <a:latin typeface="D2Coding" panose="020B0609020101020101" pitchFamily="49" charset="-127"/>
+                <a:ea typeface="D2Coding" panose="020B0609020101020101" pitchFamily="49" charset="-127"/>
+              </a:rPr>
+              <a:t>weight</a:t>
+            </a:r>
+            <a:r>
+              <a:rPr lang="ko-KR" altLang="en-US" sz="1600" dirty="0">
+                <a:latin typeface="D2Coding" panose="020B0609020101020101" pitchFamily="49" charset="-127"/>
+                <a:ea typeface="D2Coding" panose="020B0609020101020101" pitchFamily="49" charset="-127"/>
+              </a:rPr>
+              <a:t> 데이터를 자료 표준화를 하게 되면 </a:t>
+            </a:r>
+            <a:r>
+              <a:rPr lang="en-US" altLang="ko-KR" sz="1600" dirty="0">
+                <a:latin typeface="D2Coding" panose="020B0609020101020101" pitchFamily="49" charset="-127"/>
+                <a:ea typeface="D2Coding" panose="020B0609020101020101" pitchFamily="49" charset="-127"/>
+              </a:rPr>
+              <a:t>sample </a:t>
+            </a:r>
+            <a:r>
+              <a:rPr lang="ko-KR" altLang="en-US" sz="1600" dirty="0">
+                <a:latin typeface="D2Coding" panose="020B0609020101020101" pitchFamily="49" charset="-127"/>
+                <a:ea typeface="D2Coding" panose="020B0609020101020101" pitchFamily="49" charset="-127"/>
+              </a:rPr>
+              <a:t>데이터의 </a:t>
+            </a:r>
+            <a:r>
+              <a:rPr lang="en-US" altLang="ko-KR" sz="1600" dirty="0">
+                <a:latin typeface="D2Coding" panose="020B0609020101020101" pitchFamily="49" charset="-127"/>
+                <a:ea typeface="D2Coding" panose="020B0609020101020101" pitchFamily="49" charset="-127"/>
+              </a:rPr>
+              <a:t>Gender ?</a:t>
+            </a:r>
+          </a:p>
+          <a:p>
+            <a:pPr marL="342900" indent="-342900">
+              <a:lnSpc>
+                <a:spcPct val="150000"/>
+              </a:lnSpc>
+              <a:buFont typeface="+mj-lt"/>
+              <a:buAutoNum type="arabicPeriod"/>
+            </a:pPr>
+            <a:r>
+              <a:rPr lang="ko-KR" altLang="en-US" sz="1600" dirty="0">
+                <a:latin typeface="D2Coding" panose="020B0609020101020101" pitchFamily="49" charset="-127"/>
+                <a:ea typeface="D2Coding" panose="020B0609020101020101" pitchFamily="49" charset="-127"/>
+              </a:rPr>
+              <a:t>자료 표준화를 하여야 하는가 </a:t>
+            </a:r>
+            <a:r>
+              <a:rPr lang="en-US" altLang="ko-KR" sz="1600" dirty="0">
+                <a:latin typeface="D2Coding" panose="020B0609020101020101" pitchFamily="49" charset="-127"/>
+                <a:ea typeface="D2Coding" panose="020B0609020101020101" pitchFamily="49" charset="-127"/>
+              </a:rPr>
+              <a:t>? </a:t>
+            </a:r>
+            <a:r>
+              <a:rPr lang="ko-KR" altLang="en-US" sz="1600" dirty="0">
+                <a:latin typeface="D2Coding" panose="020B0609020101020101" pitchFamily="49" charset="-127"/>
+                <a:ea typeface="D2Coding" panose="020B0609020101020101" pitchFamily="49" charset="-127"/>
+              </a:rPr>
+              <a:t>그 이유는</a:t>
+            </a:r>
+            <a:r>
+              <a:rPr lang="en-US" altLang="ko-KR" sz="1600" dirty="0">
+                <a:latin typeface="D2Coding" panose="020B0609020101020101" pitchFamily="49" charset="-127"/>
+                <a:ea typeface="D2Coding" panose="020B0609020101020101" pitchFamily="49" charset="-127"/>
+              </a:rPr>
+              <a:t>?</a:t>
+            </a:r>
+          </a:p>
+        </p:txBody>
+      </p:sp>
+      <p:graphicFrame>
+        <p:nvGraphicFramePr>
+          <p:cNvPr id="2" name="표 1">
+            <a:extLst>
+              <a:ext uri="{FF2B5EF4-FFF2-40B4-BE49-F238E27FC236}">
+                <a16:creationId xmlns:a16="http://schemas.microsoft.com/office/drawing/2014/main" id="{FFA44251-8613-24F8-3D4C-D3F967958EE7}"/>
+              </a:ext>
+            </a:extLst>
+          </p:cNvPr>
+          <p:cNvGraphicFramePr>
+            <a:graphicFrameLocks noGrp="1"/>
+          </p:cNvGraphicFramePr>
+          <p:nvPr/>
+        </p:nvGraphicFramePr>
+        <p:xfrm>
+          <a:off x="1327150" y="3614017"/>
+          <a:ext cx="4235451" cy="2263140"/>
+        </p:xfrm>
+        <a:graphic>
+          <a:graphicData uri="http://schemas.openxmlformats.org/drawingml/2006/table">
+            <a:tbl>
+              <a:tblPr>
+                <a:tableStyleId>{5C22544A-7EE6-4342-B048-85BDC9FD1C3A}</a:tableStyleId>
+              </a:tblPr>
+              <a:tblGrid>
+                <a:gridCol w="1301750">
+                  <a:extLst>
+                    <a:ext uri="{9D8B030D-6E8A-4147-A177-3AD203B41FA5}">
+                      <a16:colId xmlns:a16="http://schemas.microsoft.com/office/drawing/2014/main" val="885975056"/>
+                    </a:ext>
+                  </a:extLst>
+                </a:gridCol>
+                <a:gridCol w="1466850">
+                  <a:extLst>
+                    <a:ext uri="{9D8B030D-6E8A-4147-A177-3AD203B41FA5}">
+                      <a16:colId xmlns:a16="http://schemas.microsoft.com/office/drawing/2014/main" val="1709360057"/>
+                    </a:ext>
+                  </a:extLst>
+                </a:gridCol>
+                <a:gridCol w="1466851">
+                  <a:extLst>
+                    <a:ext uri="{9D8B030D-6E8A-4147-A177-3AD203B41FA5}">
+                      <a16:colId xmlns:a16="http://schemas.microsoft.com/office/drawing/2014/main" val="4220822261"/>
+                    </a:ext>
+                  </a:extLst>
+                </a:gridCol>
+              </a:tblGrid>
+              <a:tr h="249317">
+                <a:tc>
+                  <a:txBody>
+                    <a:bodyPr/>
+                    <a:lstStyle/>
+                    <a:p>
+                      <a:pPr algn="ctr" fontAlgn="ctr">
+                        <a:buNone/>
+                      </a:pPr>
+                      <a:r>
+                        <a:rPr lang="en-US" sz="1600" u="none" strike="noStrike" dirty="0">
+                          <a:effectLst/>
+                          <a:latin typeface="D2Coding" panose="020B0609020101020101" pitchFamily="49" charset="-127"/>
+                          <a:ea typeface="D2Coding" panose="020B0609020101020101" pitchFamily="49" charset="-127"/>
+                        </a:rPr>
+                        <a:t>Person</a:t>
+                      </a:r>
+                      <a:endParaRPr lang="en-US" sz="1600" b="1" i="0" u="none" strike="noStrike" dirty="0">
+                        <a:solidFill>
+                          <a:srgbClr val="FFFFFF"/>
+                        </a:solidFill>
+                        <a:effectLst/>
+                        <a:latin typeface="D2Coding" panose="020B0609020101020101" pitchFamily="49" charset="-127"/>
+                        <a:ea typeface="D2Coding" panose="020B0609020101020101" pitchFamily="49" charset="-127"/>
+                      </a:endParaRPr>
+                    </a:p>
+                  </a:txBody>
+                  <a:tcPr marL="7620" marR="7620" marT="7620" marB="0" anchor="ctr">
+                    <a:lnL w="12700" cap="flat" cmpd="sng" algn="ctr">
+                      <a:solidFill>
+                        <a:schemeClr val="tx1"/>
+                      </a:solidFill>
+                      <a:prstDash val="solid"/>
+                      <a:round/>
+                      <a:headEnd type="none" w="med" len="med"/>
+                      <a:tailEnd type="none" w="med" len="med"/>
+                    </a:lnL>
+                    <a:lnT w="12700" cap="flat" cmpd="sng" algn="ctr">
+                      <a:solidFill>
+                        <a:schemeClr val="tx1"/>
+                      </a:solidFill>
+                      <a:prstDash val="solid"/>
+                      <a:round/>
+                      <a:headEnd type="none" w="med" len="med"/>
+                      <a:tailEnd type="none" w="med" len="med"/>
+                    </a:lnT>
+                  </a:tcPr>
+                </a:tc>
+                <a:tc>
+                  <a:txBody>
+                    <a:bodyPr/>
+                    <a:lstStyle/>
+                    <a:p>
+                      <a:pPr algn="ctr" fontAlgn="ctr">
+                        <a:buNone/>
+                      </a:pPr>
+                      <a:r>
+                        <a:rPr lang="en-US" sz="1600" u="none" strike="noStrike" dirty="0">
+                          <a:effectLst/>
+                          <a:latin typeface="D2Coding" panose="020B0609020101020101" pitchFamily="49" charset="-127"/>
+                          <a:ea typeface="D2Coding" panose="020B0609020101020101" pitchFamily="49" charset="-127"/>
+                        </a:rPr>
+                        <a:t>height (feet)</a:t>
+                      </a:r>
+                      <a:endParaRPr lang="en-US" sz="1600" b="1" i="0" u="none" strike="noStrike" dirty="0">
+                        <a:solidFill>
+                          <a:srgbClr val="FFFFFF"/>
+                        </a:solidFill>
+                        <a:effectLst/>
+                        <a:latin typeface="D2Coding" panose="020B0609020101020101" pitchFamily="49" charset="-127"/>
+                        <a:ea typeface="D2Coding" panose="020B0609020101020101" pitchFamily="49" charset="-127"/>
+                      </a:endParaRPr>
+                    </a:p>
+                  </a:txBody>
+                  <a:tcPr marL="7620" marR="7620" marT="7620" marB="0" anchor="ctr">
+                    <a:lnT w="12700" cap="flat" cmpd="sng" algn="ctr">
+                      <a:solidFill>
+                        <a:schemeClr val="tx1"/>
+                      </a:solidFill>
+                      <a:prstDash val="solid"/>
+                      <a:round/>
+                      <a:headEnd type="none" w="med" len="med"/>
+                      <a:tailEnd type="none" w="med" len="med"/>
+                    </a:lnT>
+                  </a:tcPr>
+                </a:tc>
+                <a:tc>
+                  <a:txBody>
+                    <a:bodyPr/>
+                    <a:lstStyle/>
+                    <a:p>
+                      <a:pPr algn="ctr" fontAlgn="ctr">
+                        <a:buNone/>
+                      </a:pPr>
+                      <a:r>
+                        <a:rPr lang="en-US" sz="1600" u="none" strike="noStrike" dirty="0">
+                          <a:effectLst/>
+                          <a:latin typeface="D2Coding" panose="020B0609020101020101" pitchFamily="49" charset="-127"/>
+                          <a:ea typeface="D2Coding" panose="020B0609020101020101" pitchFamily="49" charset="-127"/>
+                        </a:rPr>
+                        <a:t>weight (</a:t>
+                      </a:r>
+                      <a:r>
+                        <a:rPr lang="en-US" sz="1600" u="none" strike="noStrike" dirty="0" err="1">
+                          <a:effectLst/>
+                          <a:latin typeface="D2Coding" panose="020B0609020101020101" pitchFamily="49" charset="-127"/>
+                          <a:ea typeface="D2Coding" panose="020B0609020101020101" pitchFamily="49" charset="-127"/>
+                        </a:rPr>
+                        <a:t>lbs</a:t>
+                      </a:r>
+                      <a:r>
+                        <a:rPr lang="en-US" sz="1600" u="none" strike="noStrike" dirty="0">
+                          <a:effectLst/>
+                          <a:latin typeface="D2Coding" panose="020B0609020101020101" pitchFamily="49" charset="-127"/>
+                          <a:ea typeface="D2Coding" panose="020B0609020101020101" pitchFamily="49" charset="-127"/>
+                        </a:rPr>
+                        <a:t>)</a:t>
+                      </a:r>
+                      <a:endParaRPr lang="en-US" sz="1600" b="1" i="0" u="none" strike="noStrike" dirty="0">
+                        <a:solidFill>
+                          <a:srgbClr val="FFFFFF"/>
+                        </a:solidFill>
+                        <a:effectLst/>
+                        <a:latin typeface="D2Coding" panose="020B0609020101020101" pitchFamily="49" charset="-127"/>
+                        <a:ea typeface="D2Coding" panose="020B0609020101020101" pitchFamily="49" charset="-127"/>
+                      </a:endParaRPr>
+                    </a:p>
+                  </a:txBody>
+                  <a:tcPr marL="7620" marR="7620" marT="7620" marB="0" anchor="ctr">
+                    <a:lnR w="12700" cap="flat" cmpd="sng" algn="ctr">
+                      <a:solidFill>
+                        <a:schemeClr val="tx1"/>
+                      </a:solidFill>
+                      <a:prstDash val="solid"/>
+                      <a:round/>
+                      <a:headEnd type="none" w="med" len="med"/>
+                      <a:tailEnd type="none" w="med" len="med"/>
+                    </a:lnR>
+                    <a:lnT w="12700" cap="flat" cmpd="sng" algn="ctr">
+                      <a:solidFill>
+                        <a:schemeClr val="tx1"/>
+                      </a:solidFill>
+                      <a:prstDash val="solid"/>
+                      <a:round/>
+                      <a:headEnd type="none" w="med" len="med"/>
+                      <a:tailEnd type="none" w="med" len="med"/>
+                    </a:lnT>
+                  </a:tcPr>
+                </a:tc>
+                <a:extLst>
+                  <a:ext uri="{0D108BD9-81ED-4DB2-BD59-A6C34878D82A}">
+                    <a16:rowId xmlns:a16="http://schemas.microsoft.com/office/drawing/2014/main" val="1126446257"/>
+                  </a:ext>
+                </a:extLst>
+              </a:tr>
+              <a:tr h="249317">
+                <a:tc>
+                  <a:txBody>
+                    <a:bodyPr/>
+                    <a:lstStyle/>
+                    <a:p>
+                      <a:pPr algn="ctr" fontAlgn="b">
+                        <a:buNone/>
+                      </a:pPr>
+                      <a:r>
+                        <a:rPr lang="en-US" sz="1600" u="none" strike="noStrike">
+                          <a:effectLst/>
+                          <a:latin typeface="D2Coding" panose="020B0609020101020101" pitchFamily="49" charset="-127"/>
+                          <a:ea typeface="D2Coding" panose="020B0609020101020101" pitchFamily="49" charset="-127"/>
+                        </a:rPr>
+                        <a:t>male</a:t>
+                      </a:r>
+                      <a:endParaRPr lang="en-US" sz="1600" b="0" i="0" u="none" strike="noStrike">
+                        <a:solidFill>
+                          <a:srgbClr val="000000"/>
+                        </a:solidFill>
+                        <a:effectLst/>
+                        <a:latin typeface="D2Coding" panose="020B0609020101020101" pitchFamily="49" charset="-127"/>
+                        <a:ea typeface="D2Coding" panose="020B0609020101020101" pitchFamily="49" charset="-127"/>
+                      </a:endParaRPr>
+                    </a:p>
+                  </a:txBody>
+                  <a:tcPr marL="7620" marR="7620" marT="7620" marB="0" anchor="b">
+                    <a:lnL w="12700" cap="flat" cmpd="sng" algn="ctr">
+                      <a:solidFill>
+                        <a:schemeClr val="tx1"/>
+                      </a:solidFill>
+                      <a:prstDash val="solid"/>
+                      <a:round/>
+                      <a:headEnd type="none" w="med" len="med"/>
+                      <a:tailEnd type="none" w="med" len="med"/>
+                    </a:lnL>
+                  </a:tcPr>
+                </a:tc>
+                <a:tc>
+                  <a:txBody>
+                    <a:bodyPr/>
+                    <a:lstStyle/>
+                    <a:p>
+                      <a:pPr algn="r" fontAlgn="b">
+                        <a:buNone/>
+                      </a:pPr>
+                      <a:r>
+                        <a:rPr lang="en-US" altLang="ko-KR" sz="1600" u="none" strike="noStrike" dirty="0">
+                          <a:effectLst/>
+                          <a:latin typeface="D2Coding" panose="020B0609020101020101" pitchFamily="49" charset="-127"/>
+                          <a:ea typeface="D2Coding" panose="020B0609020101020101" pitchFamily="49" charset="-127"/>
+                        </a:rPr>
+                        <a:t>6.00</a:t>
+                      </a:r>
+                      <a:endParaRPr lang="en-US" altLang="ko-KR" sz="1600" b="0" i="0" u="none" strike="noStrike" dirty="0">
+                        <a:solidFill>
+                          <a:srgbClr val="000000"/>
+                        </a:solidFill>
+                        <a:effectLst/>
+                        <a:latin typeface="D2Coding" panose="020B0609020101020101" pitchFamily="49" charset="-127"/>
+                        <a:ea typeface="D2Coding" panose="020B0609020101020101" pitchFamily="49" charset="-127"/>
+                      </a:endParaRPr>
+                    </a:p>
+                  </a:txBody>
+                  <a:tcPr marL="7620" marR="7620" marT="7620" marB="0" anchor="b"/>
+                </a:tc>
+                <a:tc>
+                  <a:txBody>
+                    <a:bodyPr/>
+                    <a:lstStyle/>
+                    <a:p>
+                      <a:pPr algn="r" fontAlgn="b">
+                        <a:buNone/>
+                      </a:pPr>
+                      <a:r>
+                        <a:rPr lang="en-US" altLang="ko-KR" sz="1600" u="none" strike="noStrike" dirty="0">
+                          <a:effectLst/>
+                          <a:latin typeface="D2Coding" panose="020B0609020101020101" pitchFamily="49" charset="-127"/>
+                          <a:ea typeface="D2Coding" panose="020B0609020101020101" pitchFamily="49" charset="-127"/>
+                        </a:rPr>
+                        <a:t>180</a:t>
+                      </a:r>
+                      <a:endParaRPr lang="en-US" altLang="ko-KR" sz="1600" b="0" i="0" u="none" strike="noStrike" dirty="0">
+                        <a:solidFill>
+                          <a:srgbClr val="000000"/>
+                        </a:solidFill>
+                        <a:effectLst/>
+                        <a:latin typeface="D2Coding" panose="020B0609020101020101" pitchFamily="49" charset="-127"/>
+                        <a:ea typeface="D2Coding" panose="020B0609020101020101" pitchFamily="49" charset="-127"/>
+                      </a:endParaRPr>
+                    </a:p>
+                  </a:txBody>
+                  <a:tcPr marL="7620" marR="7620" marT="7620" marB="0" anchor="b">
+                    <a:lnR w="12700" cap="flat" cmpd="sng" algn="ctr">
+                      <a:solidFill>
+                        <a:schemeClr val="tx1"/>
+                      </a:solidFill>
+                      <a:prstDash val="solid"/>
+                      <a:round/>
+                      <a:headEnd type="none" w="med" len="med"/>
+                      <a:tailEnd type="none" w="med" len="med"/>
+                    </a:lnR>
+                  </a:tcPr>
+                </a:tc>
+                <a:extLst>
+                  <a:ext uri="{0D108BD9-81ED-4DB2-BD59-A6C34878D82A}">
+                    <a16:rowId xmlns:a16="http://schemas.microsoft.com/office/drawing/2014/main" val="4210223782"/>
+                  </a:ext>
+                </a:extLst>
+              </a:tr>
+              <a:tr h="249317">
+                <a:tc>
+                  <a:txBody>
+                    <a:bodyPr/>
+                    <a:lstStyle/>
+                    <a:p>
+                      <a:pPr algn="ctr" fontAlgn="b">
+                        <a:buNone/>
+                      </a:pPr>
+                      <a:r>
+                        <a:rPr lang="en-US" sz="1600" u="none" strike="noStrike">
+                          <a:effectLst/>
+                          <a:latin typeface="D2Coding" panose="020B0609020101020101" pitchFamily="49" charset="-127"/>
+                          <a:ea typeface="D2Coding" panose="020B0609020101020101" pitchFamily="49" charset="-127"/>
+                        </a:rPr>
+                        <a:t>male</a:t>
+                      </a:r>
+                      <a:endParaRPr lang="en-US" sz="1600" b="0" i="0" u="none" strike="noStrike">
+                        <a:solidFill>
+                          <a:srgbClr val="000000"/>
+                        </a:solidFill>
+                        <a:effectLst/>
+                        <a:latin typeface="D2Coding" panose="020B0609020101020101" pitchFamily="49" charset="-127"/>
+                        <a:ea typeface="D2Coding" panose="020B0609020101020101" pitchFamily="49" charset="-127"/>
+                      </a:endParaRPr>
+                    </a:p>
+                  </a:txBody>
+                  <a:tcPr marL="7620" marR="7620" marT="7620" marB="0" anchor="b">
+                    <a:lnL w="12700" cap="flat" cmpd="sng" algn="ctr">
+                      <a:solidFill>
+                        <a:schemeClr val="tx1"/>
+                      </a:solidFill>
+                      <a:prstDash val="solid"/>
+                      <a:round/>
+                      <a:headEnd type="none" w="med" len="med"/>
+                      <a:tailEnd type="none" w="med" len="med"/>
+                    </a:lnL>
+                  </a:tcPr>
+                </a:tc>
+                <a:tc>
+                  <a:txBody>
+                    <a:bodyPr/>
+                    <a:lstStyle/>
+                    <a:p>
+                      <a:pPr algn="r" fontAlgn="b">
+                        <a:buNone/>
+                      </a:pPr>
+                      <a:r>
+                        <a:rPr lang="en-US" altLang="ko-KR" sz="1600" u="none" strike="noStrike" dirty="0">
+                          <a:effectLst/>
+                          <a:latin typeface="D2Coding" panose="020B0609020101020101" pitchFamily="49" charset="-127"/>
+                          <a:ea typeface="D2Coding" panose="020B0609020101020101" pitchFamily="49" charset="-127"/>
+                        </a:rPr>
+                        <a:t>5.92</a:t>
+                      </a:r>
+                      <a:endParaRPr lang="en-US" altLang="ko-KR" sz="1600" b="0" i="0" u="none" strike="noStrike" dirty="0">
+                        <a:solidFill>
+                          <a:srgbClr val="000000"/>
+                        </a:solidFill>
+                        <a:effectLst/>
+                        <a:latin typeface="D2Coding" panose="020B0609020101020101" pitchFamily="49" charset="-127"/>
+                        <a:ea typeface="D2Coding" panose="020B0609020101020101" pitchFamily="49" charset="-127"/>
+                      </a:endParaRPr>
+                    </a:p>
+                  </a:txBody>
+                  <a:tcPr marL="7620" marR="7620" marT="7620" marB="0" anchor="b"/>
+                </a:tc>
+                <a:tc>
+                  <a:txBody>
+                    <a:bodyPr/>
+                    <a:lstStyle/>
+                    <a:p>
+                      <a:pPr algn="r" fontAlgn="b">
+                        <a:buNone/>
+                      </a:pPr>
+                      <a:r>
+                        <a:rPr lang="en-US" altLang="ko-KR" sz="1600" u="none" strike="noStrike" dirty="0">
+                          <a:effectLst/>
+                          <a:latin typeface="D2Coding" panose="020B0609020101020101" pitchFamily="49" charset="-127"/>
+                          <a:ea typeface="D2Coding" panose="020B0609020101020101" pitchFamily="49" charset="-127"/>
+                        </a:rPr>
+                        <a:t>190</a:t>
+                      </a:r>
+                      <a:endParaRPr lang="en-US" altLang="ko-KR" sz="1600" b="0" i="0" u="none" strike="noStrike" dirty="0">
+                        <a:solidFill>
+                          <a:srgbClr val="000000"/>
+                        </a:solidFill>
+                        <a:effectLst/>
+                        <a:latin typeface="D2Coding" panose="020B0609020101020101" pitchFamily="49" charset="-127"/>
+                        <a:ea typeface="D2Coding" panose="020B0609020101020101" pitchFamily="49" charset="-127"/>
+                      </a:endParaRPr>
+                    </a:p>
+                  </a:txBody>
+                  <a:tcPr marL="7620" marR="7620" marT="7620" marB="0" anchor="b">
+                    <a:lnR w="12700" cap="flat" cmpd="sng" algn="ctr">
+                      <a:solidFill>
+                        <a:schemeClr val="tx1"/>
+                      </a:solidFill>
+                      <a:prstDash val="solid"/>
+                      <a:round/>
+                      <a:headEnd type="none" w="med" len="med"/>
+                      <a:tailEnd type="none" w="med" len="med"/>
+                    </a:lnR>
+                  </a:tcPr>
+                </a:tc>
+                <a:extLst>
+                  <a:ext uri="{0D108BD9-81ED-4DB2-BD59-A6C34878D82A}">
+                    <a16:rowId xmlns:a16="http://schemas.microsoft.com/office/drawing/2014/main" val="1650078898"/>
+                  </a:ext>
+                </a:extLst>
+              </a:tr>
+              <a:tr h="249317">
+                <a:tc>
+                  <a:txBody>
+                    <a:bodyPr/>
+                    <a:lstStyle/>
+                    <a:p>
+                      <a:pPr algn="ctr" fontAlgn="b">
+                        <a:buNone/>
+                      </a:pPr>
+                      <a:r>
+                        <a:rPr lang="en-US" sz="1600" u="none" strike="noStrike" dirty="0">
+                          <a:effectLst/>
+                          <a:latin typeface="D2Coding" panose="020B0609020101020101" pitchFamily="49" charset="-127"/>
+                          <a:ea typeface="D2Coding" panose="020B0609020101020101" pitchFamily="49" charset="-127"/>
+                        </a:rPr>
+                        <a:t>male</a:t>
+                      </a:r>
+                      <a:endParaRPr lang="en-US" sz="1600" b="0" i="0" u="none" strike="noStrike" dirty="0">
+                        <a:solidFill>
+                          <a:srgbClr val="000000"/>
+                        </a:solidFill>
+                        <a:effectLst/>
+                        <a:latin typeface="D2Coding" panose="020B0609020101020101" pitchFamily="49" charset="-127"/>
+                        <a:ea typeface="D2Coding" panose="020B0609020101020101" pitchFamily="49" charset="-127"/>
+                      </a:endParaRPr>
+                    </a:p>
+                  </a:txBody>
+                  <a:tcPr marL="7620" marR="7620" marT="7620" marB="0" anchor="b">
+                    <a:lnL w="12700" cap="flat" cmpd="sng" algn="ctr">
+                      <a:solidFill>
+                        <a:schemeClr val="tx1"/>
+                      </a:solidFill>
+                      <a:prstDash val="solid"/>
+                      <a:round/>
+                      <a:headEnd type="none" w="med" len="med"/>
+                      <a:tailEnd type="none" w="med" len="med"/>
+                    </a:lnL>
+                  </a:tcPr>
+                </a:tc>
+                <a:tc>
+                  <a:txBody>
+                    <a:bodyPr/>
+                    <a:lstStyle/>
+                    <a:p>
+                      <a:pPr algn="r" fontAlgn="b">
+                        <a:buNone/>
+                      </a:pPr>
+                      <a:r>
+                        <a:rPr lang="en-US" altLang="ko-KR" sz="1600" u="none" strike="noStrike">
+                          <a:effectLst/>
+                          <a:latin typeface="D2Coding" panose="020B0609020101020101" pitchFamily="49" charset="-127"/>
+                          <a:ea typeface="D2Coding" panose="020B0609020101020101" pitchFamily="49" charset="-127"/>
+                        </a:rPr>
+                        <a:t>5.58</a:t>
+                      </a:r>
+                      <a:endParaRPr lang="en-US" altLang="ko-KR" sz="1600" b="0" i="0" u="none" strike="noStrike">
+                        <a:solidFill>
+                          <a:srgbClr val="000000"/>
+                        </a:solidFill>
+                        <a:effectLst/>
+                        <a:latin typeface="D2Coding" panose="020B0609020101020101" pitchFamily="49" charset="-127"/>
+                        <a:ea typeface="D2Coding" panose="020B0609020101020101" pitchFamily="49" charset="-127"/>
+                      </a:endParaRPr>
+                    </a:p>
+                  </a:txBody>
+                  <a:tcPr marL="7620" marR="7620" marT="7620" marB="0" anchor="b"/>
+                </a:tc>
+                <a:tc>
+                  <a:txBody>
+                    <a:bodyPr/>
+                    <a:lstStyle/>
+                    <a:p>
+                      <a:pPr algn="r" fontAlgn="b">
+                        <a:buNone/>
+                      </a:pPr>
+                      <a:r>
+                        <a:rPr lang="en-US" altLang="ko-KR" sz="1600" u="none" strike="noStrike" dirty="0">
+                          <a:effectLst/>
+                          <a:latin typeface="D2Coding" panose="020B0609020101020101" pitchFamily="49" charset="-127"/>
+                          <a:ea typeface="D2Coding" panose="020B0609020101020101" pitchFamily="49" charset="-127"/>
+                        </a:rPr>
+                        <a:t>170</a:t>
+                      </a:r>
+                      <a:endParaRPr lang="en-US" altLang="ko-KR" sz="1600" b="0" i="0" u="none" strike="noStrike" dirty="0">
+                        <a:solidFill>
+                          <a:srgbClr val="000000"/>
+                        </a:solidFill>
+                        <a:effectLst/>
+                        <a:latin typeface="D2Coding" panose="020B0609020101020101" pitchFamily="49" charset="-127"/>
+                        <a:ea typeface="D2Coding" panose="020B0609020101020101" pitchFamily="49" charset="-127"/>
+                      </a:endParaRPr>
+                    </a:p>
+                  </a:txBody>
+                  <a:tcPr marL="7620" marR="7620" marT="7620" marB="0" anchor="b">
+                    <a:lnR w="12700" cap="flat" cmpd="sng" algn="ctr">
+                      <a:solidFill>
+                        <a:schemeClr val="tx1"/>
+                      </a:solidFill>
+                      <a:prstDash val="solid"/>
+                      <a:round/>
+                      <a:headEnd type="none" w="med" len="med"/>
+                      <a:tailEnd type="none" w="med" len="med"/>
+                    </a:lnR>
+                  </a:tcPr>
+                </a:tc>
+                <a:extLst>
+                  <a:ext uri="{0D108BD9-81ED-4DB2-BD59-A6C34878D82A}">
+                    <a16:rowId xmlns:a16="http://schemas.microsoft.com/office/drawing/2014/main" val="2985846155"/>
+                  </a:ext>
+                </a:extLst>
+              </a:tr>
+              <a:tr h="249317">
+                <a:tc>
+                  <a:txBody>
+                    <a:bodyPr/>
+                    <a:lstStyle/>
+                    <a:p>
+                      <a:pPr algn="ctr" fontAlgn="b">
+                        <a:buNone/>
+                      </a:pPr>
+                      <a:r>
+                        <a:rPr lang="en-US" sz="1600" u="none" strike="noStrike">
+                          <a:effectLst/>
+                          <a:latin typeface="D2Coding" panose="020B0609020101020101" pitchFamily="49" charset="-127"/>
+                          <a:ea typeface="D2Coding" panose="020B0609020101020101" pitchFamily="49" charset="-127"/>
+                        </a:rPr>
+                        <a:t>male</a:t>
+                      </a:r>
+                      <a:endParaRPr lang="en-US" sz="1600" b="0" i="0" u="none" strike="noStrike">
+                        <a:solidFill>
+                          <a:srgbClr val="000000"/>
+                        </a:solidFill>
+                        <a:effectLst/>
+                        <a:latin typeface="D2Coding" panose="020B0609020101020101" pitchFamily="49" charset="-127"/>
+                        <a:ea typeface="D2Coding" panose="020B0609020101020101" pitchFamily="49" charset="-127"/>
+                      </a:endParaRPr>
+                    </a:p>
+                  </a:txBody>
+                  <a:tcPr marL="7620" marR="7620" marT="7620" marB="0" anchor="b">
+                    <a:lnL w="12700" cap="flat" cmpd="sng" algn="ctr">
+                      <a:solidFill>
+                        <a:schemeClr val="tx1"/>
+                      </a:solidFill>
+                      <a:prstDash val="solid"/>
+                      <a:round/>
+                      <a:headEnd type="none" w="med" len="med"/>
+                      <a:tailEnd type="none" w="med" len="med"/>
+                    </a:lnL>
+                  </a:tcPr>
+                </a:tc>
+                <a:tc>
+                  <a:txBody>
+                    <a:bodyPr/>
+                    <a:lstStyle/>
+                    <a:p>
+                      <a:pPr algn="r" fontAlgn="b">
+                        <a:buNone/>
+                      </a:pPr>
+                      <a:r>
+                        <a:rPr lang="en-US" altLang="ko-KR" sz="1600" u="none" strike="noStrike">
+                          <a:effectLst/>
+                          <a:latin typeface="D2Coding" panose="020B0609020101020101" pitchFamily="49" charset="-127"/>
+                          <a:ea typeface="D2Coding" panose="020B0609020101020101" pitchFamily="49" charset="-127"/>
+                        </a:rPr>
+                        <a:t>5.92</a:t>
+                      </a:r>
+                      <a:endParaRPr lang="en-US" altLang="ko-KR" sz="1600" b="0" i="0" u="none" strike="noStrike">
+                        <a:solidFill>
+                          <a:srgbClr val="000000"/>
+                        </a:solidFill>
+                        <a:effectLst/>
+                        <a:latin typeface="D2Coding" panose="020B0609020101020101" pitchFamily="49" charset="-127"/>
+                        <a:ea typeface="D2Coding" panose="020B0609020101020101" pitchFamily="49" charset="-127"/>
+                      </a:endParaRPr>
+                    </a:p>
+                  </a:txBody>
+                  <a:tcPr marL="7620" marR="7620" marT="7620" marB="0" anchor="b"/>
+                </a:tc>
+                <a:tc>
+                  <a:txBody>
+                    <a:bodyPr/>
+                    <a:lstStyle/>
+                    <a:p>
+                      <a:pPr algn="r" fontAlgn="b">
+                        <a:buNone/>
+                      </a:pPr>
+                      <a:r>
+                        <a:rPr lang="en-US" altLang="ko-KR" sz="1600" u="none" strike="noStrike" dirty="0">
+                          <a:effectLst/>
+                          <a:latin typeface="D2Coding" panose="020B0609020101020101" pitchFamily="49" charset="-127"/>
+                          <a:ea typeface="D2Coding" panose="020B0609020101020101" pitchFamily="49" charset="-127"/>
+                        </a:rPr>
+                        <a:t>165</a:t>
+                      </a:r>
+                      <a:endParaRPr lang="en-US" altLang="ko-KR" sz="1600" b="0" i="0" u="none" strike="noStrike" dirty="0">
+                        <a:solidFill>
+                          <a:srgbClr val="000000"/>
+                        </a:solidFill>
+                        <a:effectLst/>
+                        <a:latin typeface="D2Coding" panose="020B0609020101020101" pitchFamily="49" charset="-127"/>
+                        <a:ea typeface="D2Coding" panose="020B0609020101020101" pitchFamily="49" charset="-127"/>
+                      </a:endParaRPr>
+                    </a:p>
+                  </a:txBody>
+                  <a:tcPr marL="7620" marR="7620" marT="7620" marB="0" anchor="b">
+                    <a:lnR w="12700" cap="flat" cmpd="sng" algn="ctr">
+                      <a:solidFill>
+                        <a:schemeClr val="tx1"/>
+                      </a:solidFill>
+                      <a:prstDash val="solid"/>
+                      <a:round/>
+                      <a:headEnd type="none" w="med" len="med"/>
+                      <a:tailEnd type="none" w="med" len="med"/>
+                    </a:lnR>
+                  </a:tcPr>
+                </a:tc>
+                <a:extLst>
+                  <a:ext uri="{0D108BD9-81ED-4DB2-BD59-A6C34878D82A}">
+                    <a16:rowId xmlns:a16="http://schemas.microsoft.com/office/drawing/2014/main" val="2417384479"/>
+                  </a:ext>
+                </a:extLst>
+              </a:tr>
+              <a:tr h="249317">
+                <a:tc>
+                  <a:txBody>
+                    <a:bodyPr/>
+                    <a:lstStyle/>
+                    <a:p>
+                      <a:pPr algn="ctr" fontAlgn="b">
+                        <a:buNone/>
+                      </a:pPr>
+                      <a:r>
+                        <a:rPr lang="en-US" sz="1600" u="none" strike="noStrike">
+                          <a:effectLst/>
+                          <a:latin typeface="D2Coding" panose="020B0609020101020101" pitchFamily="49" charset="-127"/>
+                          <a:ea typeface="D2Coding" panose="020B0609020101020101" pitchFamily="49" charset="-127"/>
+                        </a:rPr>
+                        <a:t>female</a:t>
+                      </a:r>
+                      <a:endParaRPr lang="en-US" sz="1600" b="0" i="0" u="none" strike="noStrike">
+                        <a:solidFill>
+                          <a:srgbClr val="000000"/>
+                        </a:solidFill>
+                        <a:effectLst/>
+                        <a:latin typeface="D2Coding" panose="020B0609020101020101" pitchFamily="49" charset="-127"/>
+                        <a:ea typeface="D2Coding" panose="020B0609020101020101" pitchFamily="49" charset="-127"/>
+                      </a:endParaRPr>
+                    </a:p>
+                  </a:txBody>
+                  <a:tcPr marL="7620" marR="7620" marT="7620" marB="0" anchor="b">
+                    <a:lnL w="12700" cap="flat" cmpd="sng" algn="ctr">
+                      <a:solidFill>
+                        <a:schemeClr val="tx1"/>
+                      </a:solidFill>
+                      <a:prstDash val="solid"/>
+                      <a:round/>
+                      <a:headEnd type="none" w="med" len="med"/>
+                      <a:tailEnd type="none" w="med" len="med"/>
+                    </a:lnL>
+                  </a:tcPr>
+                </a:tc>
+                <a:tc>
+                  <a:txBody>
+                    <a:bodyPr/>
+                    <a:lstStyle/>
+                    <a:p>
+                      <a:pPr algn="r" fontAlgn="b">
+                        <a:buNone/>
+                      </a:pPr>
+                      <a:r>
+                        <a:rPr lang="en-US" altLang="ko-KR" sz="1600" u="none" strike="noStrike">
+                          <a:effectLst/>
+                          <a:latin typeface="D2Coding" panose="020B0609020101020101" pitchFamily="49" charset="-127"/>
+                          <a:ea typeface="D2Coding" panose="020B0609020101020101" pitchFamily="49" charset="-127"/>
+                        </a:rPr>
+                        <a:t>5.00</a:t>
+                      </a:r>
+                      <a:endParaRPr lang="en-US" altLang="ko-KR" sz="1600" b="0" i="0" u="none" strike="noStrike">
+                        <a:solidFill>
+                          <a:srgbClr val="000000"/>
+                        </a:solidFill>
+                        <a:effectLst/>
+                        <a:latin typeface="D2Coding" panose="020B0609020101020101" pitchFamily="49" charset="-127"/>
+                        <a:ea typeface="D2Coding" panose="020B0609020101020101" pitchFamily="49" charset="-127"/>
+                      </a:endParaRPr>
+                    </a:p>
+                  </a:txBody>
+                  <a:tcPr marL="7620" marR="7620" marT="7620" marB="0" anchor="b"/>
+                </a:tc>
+                <a:tc>
+                  <a:txBody>
+                    <a:bodyPr/>
+                    <a:lstStyle/>
+                    <a:p>
+                      <a:pPr algn="r" fontAlgn="b">
+                        <a:buNone/>
+                      </a:pPr>
+                      <a:r>
+                        <a:rPr lang="en-US" altLang="ko-KR" sz="1600" u="none" strike="noStrike" dirty="0">
+                          <a:effectLst/>
+                          <a:latin typeface="D2Coding" panose="020B0609020101020101" pitchFamily="49" charset="-127"/>
+                          <a:ea typeface="D2Coding" panose="020B0609020101020101" pitchFamily="49" charset="-127"/>
+                        </a:rPr>
+                        <a:t>100</a:t>
+                      </a:r>
+                      <a:endParaRPr lang="en-US" altLang="ko-KR" sz="1600" b="0" i="0" u="none" strike="noStrike" dirty="0">
+                        <a:solidFill>
+                          <a:srgbClr val="000000"/>
+                        </a:solidFill>
+                        <a:effectLst/>
+                        <a:latin typeface="D2Coding" panose="020B0609020101020101" pitchFamily="49" charset="-127"/>
+                        <a:ea typeface="D2Coding" panose="020B0609020101020101" pitchFamily="49" charset="-127"/>
+                      </a:endParaRPr>
+                    </a:p>
+                  </a:txBody>
+                  <a:tcPr marL="7620" marR="7620" marT="7620" marB="0" anchor="b">
+                    <a:lnR w="12700" cap="flat" cmpd="sng" algn="ctr">
+                      <a:solidFill>
+                        <a:schemeClr val="tx1"/>
+                      </a:solidFill>
+                      <a:prstDash val="solid"/>
+                      <a:round/>
+                      <a:headEnd type="none" w="med" len="med"/>
+                      <a:tailEnd type="none" w="med" len="med"/>
+                    </a:lnR>
+                  </a:tcPr>
+                </a:tc>
+                <a:extLst>
+                  <a:ext uri="{0D108BD9-81ED-4DB2-BD59-A6C34878D82A}">
+                    <a16:rowId xmlns:a16="http://schemas.microsoft.com/office/drawing/2014/main" val="2950173341"/>
+                  </a:ext>
+                </a:extLst>
+              </a:tr>
+              <a:tr h="249317">
+                <a:tc>
+                  <a:txBody>
+                    <a:bodyPr/>
+                    <a:lstStyle/>
+                    <a:p>
+                      <a:pPr algn="ctr" fontAlgn="b">
+                        <a:buNone/>
+                      </a:pPr>
+                      <a:r>
+                        <a:rPr lang="en-US" sz="1600" u="none" strike="noStrike">
+                          <a:effectLst/>
+                          <a:latin typeface="D2Coding" panose="020B0609020101020101" pitchFamily="49" charset="-127"/>
+                          <a:ea typeface="D2Coding" panose="020B0609020101020101" pitchFamily="49" charset="-127"/>
+                        </a:rPr>
+                        <a:t>female</a:t>
+                      </a:r>
+                      <a:endParaRPr lang="en-US" sz="1600" b="0" i="0" u="none" strike="noStrike">
+                        <a:solidFill>
+                          <a:srgbClr val="000000"/>
+                        </a:solidFill>
+                        <a:effectLst/>
+                        <a:latin typeface="D2Coding" panose="020B0609020101020101" pitchFamily="49" charset="-127"/>
+                        <a:ea typeface="D2Coding" panose="020B0609020101020101" pitchFamily="49" charset="-127"/>
+                      </a:endParaRPr>
+                    </a:p>
+                  </a:txBody>
+                  <a:tcPr marL="7620" marR="7620" marT="7620" marB="0" anchor="b">
+                    <a:lnL w="12700" cap="flat" cmpd="sng" algn="ctr">
+                      <a:solidFill>
+                        <a:schemeClr val="tx1"/>
+                      </a:solidFill>
+                      <a:prstDash val="solid"/>
+                      <a:round/>
+                      <a:headEnd type="none" w="med" len="med"/>
+                      <a:tailEnd type="none" w="med" len="med"/>
+                    </a:lnL>
+                  </a:tcPr>
+                </a:tc>
+                <a:tc>
+                  <a:txBody>
+                    <a:bodyPr/>
+                    <a:lstStyle/>
+                    <a:p>
+                      <a:pPr algn="r" fontAlgn="b">
+                        <a:buNone/>
+                      </a:pPr>
+                      <a:r>
+                        <a:rPr lang="en-US" altLang="ko-KR" sz="1600" u="none" strike="noStrike">
+                          <a:effectLst/>
+                          <a:latin typeface="D2Coding" panose="020B0609020101020101" pitchFamily="49" charset="-127"/>
+                          <a:ea typeface="D2Coding" panose="020B0609020101020101" pitchFamily="49" charset="-127"/>
+                        </a:rPr>
+                        <a:t>5.50</a:t>
+                      </a:r>
+                      <a:endParaRPr lang="en-US" altLang="ko-KR" sz="1600" b="0" i="0" u="none" strike="noStrike">
+                        <a:solidFill>
+                          <a:srgbClr val="000000"/>
+                        </a:solidFill>
+                        <a:effectLst/>
+                        <a:latin typeface="D2Coding" panose="020B0609020101020101" pitchFamily="49" charset="-127"/>
+                        <a:ea typeface="D2Coding" panose="020B0609020101020101" pitchFamily="49" charset="-127"/>
+                      </a:endParaRPr>
+                    </a:p>
+                  </a:txBody>
+                  <a:tcPr marL="7620" marR="7620" marT="7620" marB="0" anchor="b"/>
+                </a:tc>
+                <a:tc>
+                  <a:txBody>
+                    <a:bodyPr/>
+                    <a:lstStyle/>
+                    <a:p>
+                      <a:pPr algn="r" fontAlgn="b">
+                        <a:buNone/>
+                      </a:pPr>
+                      <a:r>
+                        <a:rPr lang="en-US" altLang="ko-KR" sz="1600" u="none" strike="noStrike" dirty="0">
+                          <a:effectLst/>
+                          <a:latin typeface="D2Coding" panose="020B0609020101020101" pitchFamily="49" charset="-127"/>
+                          <a:ea typeface="D2Coding" panose="020B0609020101020101" pitchFamily="49" charset="-127"/>
+                        </a:rPr>
+                        <a:t>150</a:t>
+                      </a:r>
+                      <a:endParaRPr lang="en-US" altLang="ko-KR" sz="1600" b="0" i="0" u="none" strike="noStrike" dirty="0">
+                        <a:solidFill>
+                          <a:srgbClr val="000000"/>
+                        </a:solidFill>
+                        <a:effectLst/>
+                        <a:latin typeface="D2Coding" panose="020B0609020101020101" pitchFamily="49" charset="-127"/>
+                        <a:ea typeface="D2Coding" panose="020B0609020101020101" pitchFamily="49" charset="-127"/>
+                      </a:endParaRPr>
+                    </a:p>
+                  </a:txBody>
+                  <a:tcPr marL="7620" marR="7620" marT="7620" marB="0" anchor="b">
+                    <a:lnR w="12700" cap="flat" cmpd="sng" algn="ctr">
+                      <a:solidFill>
+                        <a:schemeClr val="tx1"/>
+                      </a:solidFill>
+                      <a:prstDash val="solid"/>
+                      <a:round/>
+                      <a:headEnd type="none" w="med" len="med"/>
+                      <a:tailEnd type="none" w="med" len="med"/>
+                    </a:lnR>
+                  </a:tcPr>
+                </a:tc>
+                <a:extLst>
+                  <a:ext uri="{0D108BD9-81ED-4DB2-BD59-A6C34878D82A}">
+                    <a16:rowId xmlns:a16="http://schemas.microsoft.com/office/drawing/2014/main" val="855513846"/>
+                  </a:ext>
+                </a:extLst>
+              </a:tr>
+              <a:tr h="249317">
+                <a:tc>
+                  <a:txBody>
+                    <a:bodyPr/>
+                    <a:lstStyle/>
+                    <a:p>
+                      <a:pPr algn="ctr" fontAlgn="b">
+                        <a:buNone/>
+                      </a:pPr>
+                      <a:r>
+                        <a:rPr lang="en-US" sz="1600" u="none" strike="noStrike">
+                          <a:effectLst/>
+                          <a:latin typeface="D2Coding" panose="020B0609020101020101" pitchFamily="49" charset="-127"/>
+                          <a:ea typeface="D2Coding" panose="020B0609020101020101" pitchFamily="49" charset="-127"/>
+                        </a:rPr>
+                        <a:t>female</a:t>
+                      </a:r>
+                      <a:endParaRPr lang="en-US" sz="1600" b="0" i="0" u="none" strike="noStrike">
+                        <a:solidFill>
+                          <a:srgbClr val="000000"/>
+                        </a:solidFill>
+                        <a:effectLst/>
+                        <a:latin typeface="D2Coding" panose="020B0609020101020101" pitchFamily="49" charset="-127"/>
+                        <a:ea typeface="D2Coding" panose="020B0609020101020101" pitchFamily="49" charset="-127"/>
+                      </a:endParaRPr>
+                    </a:p>
+                  </a:txBody>
+                  <a:tcPr marL="7620" marR="7620" marT="7620" marB="0" anchor="b">
+                    <a:lnL w="12700" cap="flat" cmpd="sng" algn="ctr">
+                      <a:solidFill>
+                        <a:schemeClr val="tx1"/>
+                      </a:solidFill>
+                      <a:prstDash val="solid"/>
+                      <a:round/>
+                      <a:headEnd type="none" w="med" len="med"/>
+                      <a:tailEnd type="none" w="med" len="med"/>
+                    </a:lnL>
+                  </a:tcPr>
+                </a:tc>
+                <a:tc>
+                  <a:txBody>
+                    <a:bodyPr/>
+                    <a:lstStyle/>
+                    <a:p>
+                      <a:pPr algn="r" fontAlgn="b">
+                        <a:buNone/>
+                      </a:pPr>
+                      <a:r>
+                        <a:rPr lang="en-US" altLang="ko-KR" sz="1600" u="none" strike="noStrike">
+                          <a:effectLst/>
+                          <a:latin typeface="D2Coding" panose="020B0609020101020101" pitchFamily="49" charset="-127"/>
+                          <a:ea typeface="D2Coding" panose="020B0609020101020101" pitchFamily="49" charset="-127"/>
+                        </a:rPr>
+                        <a:t>5.42</a:t>
+                      </a:r>
+                      <a:endParaRPr lang="en-US" altLang="ko-KR" sz="1600" b="0" i="0" u="none" strike="noStrike">
+                        <a:solidFill>
+                          <a:srgbClr val="000000"/>
+                        </a:solidFill>
+                        <a:effectLst/>
+                        <a:latin typeface="D2Coding" panose="020B0609020101020101" pitchFamily="49" charset="-127"/>
+                        <a:ea typeface="D2Coding" panose="020B0609020101020101" pitchFamily="49" charset="-127"/>
+                      </a:endParaRPr>
+                    </a:p>
+                  </a:txBody>
+                  <a:tcPr marL="7620" marR="7620" marT="7620" marB="0" anchor="b"/>
+                </a:tc>
+                <a:tc>
+                  <a:txBody>
+                    <a:bodyPr/>
+                    <a:lstStyle/>
+                    <a:p>
+                      <a:pPr algn="r" fontAlgn="b">
+                        <a:buNone/>
+                      </a:pPr>
+                      <a:r>
+                        <a:rPr lang="en-US" altLang="ko-KR" sz="1600" u="none" strike="noStrike">
+                          <a:effectLst/>
+                          <a:latin typeface="D2Coding" panose="020B0609020101020101" pitchFamily="49" charset="-127"/>
+                          <a:ea typeface="D2Coding" panose="020B0609020101020101" pitchFamily="49" charset="-127"/>
+                        </a:rPr>
+                        <a:t>130</a:t>
+                      </a:r>
+                      <a:endParaRPr lang="en-US" altLang="ko-KR" sz="1600" b="0" i="0" u="none" strike="noStrike">
+                        <a:solidFill>
+                          <a:srgbClr val="000000"/>
+                        </a:solidFill>
+                        <a:effectLst/>
+                        <a:latin typeface="D2Coding" panose="020B0609020101020101" pitchFamily="49" charset="-127"/>
+                        <a:ea typeface="D2Coding" panose="020B0609020101020101" pitchFamily="49" charset="-127"/>
+                      </a:endParaRPr>
+                    </a:p>
+                  </a:txBody>
+                  <a:tcPr marL="7620" marR="7620" marT="7620" marB="0" anchor="b">
+                    <a:lnR w="12700" cap="flat" cmpd="sng" algn="ctr">
+                      <a:solidFill>
+                        <a:schemeClr val="tx1"/>
+                      </a:solidFill>
+                      <a:prstDash val="solid"/>
+                      <a:round/>
+                      <a:headEnd type="none" w="med" len="med"/>
+                      <a:tailEnd type="none" w="med" len="med"/>
+                    </a:lnR>
+                  </a:tcPr>
+                </a:tc>
+                <a:extLst>
+                  <a:ext uri="{0D108BD9-81ED-4DB2-BD59-A6C34878D82A}">
+                    <a16:rowId xmlns:a16="http://schemas.microsoft.com/office/drawing/2014/main" val="3944482687"/>
+                  </a:ext>
+                </a:extLst>
+              </a:tr>
+              <a:tr h="249317">
+                <a:tc>
+                  <a:txBody>
+                    <a:bodyPr/>
+                    <a:lstStyle/>
+                    <a:p>
+                      <a:pPr algn="ctr" fontAlgn="b">
+                        <a:buNone/>
+                      </a:pPr>
+                      <a:r>
+                        <a:rPr lang="en-US" sz="1600" u="none" strike="noStrike">
+                          <a:effectLst/>
+                          <a:latin typeface="D2Coding" panose="020B0609020101020101" pitchFamily="49" charset="-127"/>
+                          <a:ea typeface="D2Coding" panose="020B0609020101020101" pitchFamily="49" charset="-127"/>
+                        </a:rPr>
+                        <a:t>female</a:t>
+                      </a:r>
+                      <a:endParaRPr lang="en-US" sz="1600" b="0" i="0" u="none" strike="noStrike">
+                        <a:solidFill>
+                          <a:srgbClr val="000000"/>
+                        </a:solidFill>
+                        <a:effectLst/>
+                        <a:latin typeface="D2Coding" panose="020B0609020101020101" pitchFamily="49" charset="-127"/>
+                        <a:ea typeface="D2Coding" panose="020B0609020101020101" pitchFamily="49" charset="-127"/>
+                      </a:endParaRPr>
+                    </a:p>
+                  </a:txBody>
+                  <a:tcPr marL="7620" marR="7620" marT="7620" marB="0" anchor="b">
+                    <a:lnL w="12700" cap="flat" cmpd="sng" algn="ctr">
+                      <a:solidFill>
+                        <a:schemeClr val="tx1"/>
+                      </a:solidFill>
+                      <a:prstDash val="solid"/>
+                      <a:round/>
+                      <a:headEnd type="none" w="med" len="med"/>
+                      <a:tailEnd type="none" w="med" len="med"/>
+                    </a:lnL>
+                    <a:lnB w="12700" cap="flat" cmpd="sng" algn="ctr">
+                      <a:solidFill>
+                        <a:schemeClr val="tx1"/>
+                      </a:solidFill>
+                      <a:prstDash val="solid"/>
+                      <a:round/>
+                      <a:headEnd type="none" w="med" len="med"/>
+                      <a:tailEnd type="none" w="med" len="med"/>
+                    </a:lnB>
+                  </a:tcPr>
+                </a:tc>
+                <a:tc>
+                  <a:txBody>
+                    <a:bodyPr/>
+                    <a:lstStyle/>
+                    <a:p>
+                      <a:pPr algn="r" fontAlgn="b">
+                        <a:buNone/>
+                      </a:pPr>
+                      <a:r>
+                        <a:rPr lang="en-US" altLang="ko-KR" sz="1600" u="none" strike="noStrike">
+                          <a:effectLst/>
+                          <a:latin typeface="D2Coding" panose="020B0609020101020101" pitchFamily="49" charset="-127"/>
+                          <a:ea typeface="D2Coding" panose="020B0609020101020101" pitchFamily="49" charset="-127"/>
+                        </a:rPr>
+                        <a:t>5.75</a:t>
+                      </a:r>
+                      <a:endParaRPr lang="en-US" altLang="ko-KR" sz="1600" b="0" i="0" u="none" strike="noStrike">
+                        <a:solidFill>
+                          <a:srgbClr val="000000"/>
+                        </a:solidFill>
+                        <a:effectLst/>
+                        <a:latin typeface="D2Coding" panose="020B0609020101020101" pitchFamily="49" charset="-127"/>
+                        <a:ea typeface="D2Coding" panose="020B0609020101020101" pitchFamily="49" charset="-127"/>
+                      </a:endParaRPr>
+                    </a:p>
+                  </a:txBody>
+                  <a:tcPr marL="7620" marR="7620" marT="7620" marB="0" anchor="b">
+                    <a:lnB w="12700" cap="flat" cmpd="sng" algn="ctr">
+                      <a:solidFill>
+                        <a:schemeClr val="tx1"/>
+                      </a:solidFill>
+                      <a:prstDash val="solid"/>
+                      <a:round/>
+                      <a:headEnd type="none" w="med" len="med"/>
+                      <a:tailEnd type="none" w="med" len="med"/>
+                    </a:lnB>
+                  </a:tcPr>
+                </a:tc>
+                <a:tc>
+                  <a:txBody>
+                    <a:bodyPr/>
+                    <a:lstStyle/>
+                    <a:p>
+                      <a:pPr algn="r" fontAlgn="b">
+                        <a:buNone/>
+                      </a:pPr>
+                      <a:r>
+                        <a:rPr lang="en-US" altLang="ko-KR" sz="1600" u="none" strike="noStrike" dirty="0">
+                          <a:effectLst/>
+                          <a:latin typeface="D2Coding" panose="020B0609020101020101" pitchFamily="49" charset="-127"/>
+                          <a:ea typeface="D2Coding" panose="020B0609020101020101" pitchFamily="49" charset="-127"/>
+                        </a:rPr>
+                        <a:t>150</a:t>
+                      </a:r>
+                      <a:endParaRPr lang="en-US" altLang="ko-KR" sz="1600" b="0" i="0" u="none" strike="noStrike" dirty="0">
+                        <a:solidFill>
+                          <a:srgbClr val="000000"/>
+                        </a:solidFill>
+                        <a:effectLst/>
+                        <a:latin typeface="D2Coding" panose="020B0609020101020101" pitchFamily="49" charset="-127"/>
+                        <a:ea typeface="D2Coding" panose="020B0609020101020101" pitchFamily="49" charset="-127"/>
+                      </a:endParaRPr>
+                    </a:p>
+                  </a:txBody>
+                  <a:tcPr marL="7620" marR="7620" marT="7620" marB="0" anchor="b">
+                    <a:lnR w="12700" cap="flat" cmpd="sng" algn="ctr">
+                      <a:solidFill>
+                        <a:schemeClr val="tx1"/>
+                      </a:solidFill>
+                      <a:prstDash val="solid"/>
+                      <a:round/>
+                      <a:headEnd type="none" w="med" len="med"/>
+                      <a:tailEnd type="none" w="med" len="med"/>
+                    </a:lnR>
+                    <a:lnB w="12700" cap="flat" cmpd="sng" algn="ctr">
+                      <a:solidFill>
+                        <a:schemeClr val="tx1"/>
+                      </a:solidFill>
+                      <a:prstDash val="solid"/>
+                      <a:round/>
+                      <a:headEnd type="none" w="med" len="med"/>
+                      <a:tailEnd type="none" w="med" len="med"/>
+                    </a:lnB>
+                  </a:tcPr>
+                </a:tc>
+                <a:extLst>
+                  <a:ext uri="{0D108BD9-81ED-4DB2-BD59-A6C34878D82A}">
+                    <a16:rowId xmlns:a16="http://schemas.microsoft.com/office/drawing/2014/main" val="1972239538"/>
+                  </a:ext>
+                </a:extLst>
+              </a:tr>
+            </a:tbl>
+          </a:graphicData>
+        </a:graphic>
+      </p:graphicFrame>
+      <p:graphicFrame>
+        <p:nvGraphicFramePr>
+          <p:cNvPr id="21" name="표 20">
+            <a:extLst>
+              <a:ext uri="{FF2B5EF4-FFF2-40B4-BE49-F238E27FC236}">
+                <a16:creationId xmlns:a16="http://schemas.microsoft.com/office/drawing/2014/main" id="{DF62C6DB-26D7-B10F-C7AD-2F06C99E2F23}"/>
+              </a:ext>
+            </a:extLst>
+          </p:cNvPr>
+          <p:cNvGraphicFramePr>
+            <a:graphicFrameLocks noGrp="1"/>
+          </p:cNvGraphicFramePr>
+          <p:nvPr/>
+        </p:nvGraphicFramePr>
+        <p:xfrm>
+          <a:off x="6365875" y="3614017"/>
+          <a:ext cx="3860800" cy="502920"/>
+        </p:xfrm>
+        <a:graphic>
+          <a:graphicData uri="http://schemas.openxmlformats.org/drawingml/2006/table">
+            <a:tbl>
+              <a:tblPr>
+                <a:tableStyleId>{21E4AEA4-8DFA-4A89-87EB-49C32662AFE0}</a:tableStyleId>
+              </a:tblPr>
+              <a:tblGrid>
+                <a:gridCol w="1406525">
+                  <a:extLst>
+                    <a:ext uri="{9D8B030D-6E8A-4147-A177-3AD203B41FA5}">
+                      <a16:colId xmlns:a16="http://schemas.microsoft.com/office/drawing/2014/main" val="2141769045"/>
+                    </a:ext>
+                  </a:extLst>
+                </a:gridCol>
+                <a:gridCol w="1314450">
+                  <a:extLst>
+                    <a:ext uri="{9D8B030D-6E8A-4147-A177-3AD203B41FA5}">
+                      <a16:colId xmlns:a16="http://schemas.microsoft.com/office/drawing/2014/main" val="1955651386"/>
+                    </a:ext>
+                  </a:extLst>
+                </a:gridCol>
+                <a:gridCol w="1139825">
+                  <a:extLst>
+                    <a:ext uri="{9D8B030D-6E8A-4147-A177-3AD203B41FA5}">
+                      <a16:colId xmlns:a16="http://schemas.microsoft.com/office/drawing/2014/main" val="2144013788"/>
+                    </a:ext>
+                  </a:extLst>
+                </a:gridCol>
+              </a:tblGrid>
+              <a:tr h="220980">
+                <a:tc>
+                  <a:txBody>
+                    <a:bodyPr/>
+                    <a:lstStyle/>
+                    <a:p>
+                      <a:pPr algn="ctr" fontAlgn="b">
+                        <a:buNone/>
+                      </a:pPr>
+                      <a:r>
+                        <a:rPr lang="en-US" sz="1600" u="none" strike="noStrike" dirty="0">
+                          <a:effectLst/>
+                        </a:rPr>
+                        <a:t>Person</a:t>
+                      </a:r>
+                      <a:endParaRPr lang="en-US" sz="1600" b="1" i="0" u="none" strike="noStrike" dirty="0">
+                        <a:solidFill>
+                          <a:srgbClr val="FFFFFF"/>
+                        </a:solidFill>
+                        <a:effectLst/>
+                        <a:latin typeface="D2Coding" panose="020B0609020101020101" pitchFamily="49" charset="-127"/>
+                        <a:ea typeface="D2Coding" panose="020B0609020101020101" pitchFamily="49" charset="-127"/>
+                      </a:endParaRPr>
+                    </a:p>
+                  </a:txBody>
+                  <a:tcPr marL="7620" marR="7620" marT="7620" marB="0" anchor="b">
+                    <a:lnL w="12700" cap="flat" cmpd="sng" algn="ctr">
+                      <a:solidFill>
+                        <a:schemeClr val="tx1"/>
+                      </a:solidFill>
+                      <a:prstDash val="solid"/>
+                      <a:round/>
+                      <a:headEnd type="none" w="med" len="med"/>
+                      <a:tailEnd type="none" w="med" len="med"/>
+                    </a:lnL>
+                    <a:lnT w="12700" cap="flat" cmpd="sng" algn="ctr">
+                      <a:solidFill>
+                        <a:schemeClr val="tx1"/>
+                      </a:solidFill>
+                      <a:prstDash val="solid"/>
+                      <a:round/>
+                      <a:headEnd type="none" w="med" len="med"/>
+                      <a:tailEnd type="none" w="med" len="med"/>
+                    </a:lnT>
+                  </a:tcPr>
+                </a:tc>
+                <a:tc>
+                  <a:txBody>
+                    <a:bodyPr/>
+                    <a:lstStyle/>
+                    <a:p>
+                      <a:pPr algn="ctr" fontAlgn="b">
+                        <a:buNone/>
+                      </a:pPr>
+                      <a:r>
+                        <a:rPr lang="en-US" sz="1600" u="none" strike="noStrike" dirty="0">
+                          <a:effectLst/>
+                        </a:rPr>
+                        <a:t>height (feet)</a:t>
+                      </a:r>
+                      <a:endParaRPr lang="en-US" sz="1600" b="1" i="0" u="none" strike="noStrike" dirty="0">
+                        <a:solidFill>
+                          <a:srgbClr val="FFFFFF"/>
+                        </a:solidFill>
+                        <a:effectLst/>
+                        <a:latin typeface="D2Coding" panose="020B0609020101020101" pitchFamily="49" charset="-127"/>
+                        <a:ea typeface="D2Coding" panose="020B0609020101020101" pitchFamily="49" charset="-127"/>
+                      </a:endParaRPr>
+                    </a:p>
+                  </a:txBody>
+                  <a:tcPr marL="7620" marR="7620" marT="7620" marB="0" anchor="b">
+                    <a:lnT w="12700" cap="flat" cmpd="sng" algn="ctr">
+                      <a:solidFill>
+                        <a:schemeClr val="tx1"/>
+                      </a:solidFill>
+                      <a:prstDash val="solid"/>
+                      <a:round/>
+                      <a:headEnd type="none" w="med" len="med"/>
+                      <a:tailEnd type="none" w="med" len="med"/>
+                    </a:lnT>
+                  </a:tcPr>
+                </a:tc>
+                <a:tc>
+                  <a:txBody>
+                    <a:bodyPr/>
+                    <a:lstStyle/>
+                    <a:p>
+                      <a:pPr algn="ctr" fontAlgn="b">
+                        <a:buNone/>
+                      </a:pPr>
+                      <a:r>
+                        <a:rPr lang="en-US" sz="1600" u="none" strike="noStrike">
+                          <a:effectLst/>
+                        </a:rPr>
+                        <a:t>weight (lbs)</a:t>
+                      </a:r>
+                      <a:endParaRPr lang="en-US" sz="1600" b="1" i="0" u="none" strike="noStrike">
+                        <a:solidFill>
+                          <a:srgbClr val="FFFFFF"/>
+                        </a:solidFill>
+                        <a:effectLst/>
+                        <a:latin typeface="D2Coding" panose="020B0609020101020101" pitchFamily="49" charset="-127"/>
+                        <a:ea typeface="D2Coding" panose="020B0609020101020101" pitchFamily="49" charset="-127"/>
+                      </a:endParaRPr>
+                    </a:p>
+                  </a:txBody>
+                  <a:tcPr marL="7620" marR="7620" marT="7620" marB="0" anchor="b">
+                    <a:lnR w="12700" cap="flat" cmpd="sng" algn="ctr">
+                      <a:solidFill>
+                        <a:schemeClr val="tx1"/>
+                      </a:solidFill>
+                      <a:prstDash val="solid"/>
+                      <a:round/>
+                      <a:headEnd type="none" w="med" len="med"/>
+                      <a:tailEnd type="none" w="med" len="med"/>
+                    </a:lnR>
+                    <a:lnT w="12700" cap="flat" cmpd="sng" algn="ctr">
+                      <a:solidFill>
+                        <a:schemeClr val="tx1"/>
+                      </a:solidFill>
+                      <a:prstDash val="solid"/>
+                      <a:round/>
+                      <a:headEnd type="none" w="med" len="med"/>
+                      <a:tailEnd type="none" w="med" len="med"/>
+                    </a:lnT>
+                  </a:tcPr>
+                </a:tc>
+                <a:extLst>
+                  <a:ext uri="{0D108BD9-81ED-4DB2-BD59-A6C34878D82A}">
+                    <a16:rowId xmlns:a16="http://schemas.microsoft.com/office/drawing/2014/main" val="3747279706"/>
+                  </a:ext>
+                </a:extLst>
+              </a:tr>
+              <a:tr h="220980">
+                <a:tc>
+                  <a:txBody>
+                    <a:bodyPr/>
+                    <a:lstStyle/>
+                    <a:p>
+                      <a:pPr algn="ctr" fontAlgn="b">
+                        <a:buNone/>
+                      </a:pPr>
+                      <a:r>
+                        <a:rPr lang="en-US" sz="1600" u="none" strike="noStrike">
+                          <a:effectLst/>
+                        </a:rPr>
+                        <a:t>sample</a:t>
+                      </a:r>
+                      <a:endParaRPr lang="en-US" sz="1600" b="1" i="0" u="none" strike="noStrike">
+                        <a:solidFill>
+                          <a:srgbClr val="000000"/>
+                        </a:solidFill>
+                        <a:effectLst/>
+                        <a:latin typeface="D2Coding" panose="020B0609020101020101" pitchFamily="49" charset="-127"/>
+                        <a:ea typeface="D2Coding" panose="020B0609020101020101" pitchFamily="49" charset="-127"/>
+                      </a:endParaRPr>
+                    </a:p>
+                  </a:txBody>
+                  <a:tcPr marL="7620" marR="7620" marT="7620" marB="0" anchor="b">
+                    <a:lnL w="12700" cap="flat" cmpd="sng" algn="ctr">
+                      <a:solidFill>
+                        <a:schemeClr val="tx1"/>
+                      </a:solidFill>
+                      <a:prstDash val="solid"/>
+                      <a:round/>
+                      <a:headEnd type="none" w="med" len="med"/>
+                      <a:tailEnd type="none" w="med" len="med"/>
+                    </a:lnL>
+                    <a:lnB w="12700" cap="flat" cmpd="sng" algn="ctr">
+                      <a:solidFill>
+                        <a:schemeClr val="tx1"/>
+                      </a:solidFill>
+                      <a:prstDash val="solid"/>
+                      <a:round/>
+                      <a:headEnd type="none" w="med" len="med"/>
+                      <a:tailEnd type="none" w="med" len="med"/>
+                    </a:lnB>
+                  </a:tcPr>
+                </a:tc>
+                <a:tc>
+                  <a:txBody>
+                    <a:bodyPr/>
+                    <a:lstStyle/>
+                    <a:p>
+                      <a:pPr algn="ctr" fontAlgn="b">
+                        <a:buNone/>
+                      </a:pPr>
+                      <a:r>
+                        <a:rPr lang="en-US" altLang="ko-KR" sz="1600" u="none" strike="noStrike" dirty="0">
+                          <a:effectLst/>
+                        </a:rPr>
+                        <a:t>6</a:t>
+                      </a:r>
+                      <a:endParaRPr lang="en-US" altLang="ko-KR" sz="1600" b="1" i="0" u="none" strike="noStrike" dirty="0">
+                        <a:solidFill>
+                          <a:srgbClr val="000000"/>
+                        </a:solidFill>
+                        <a:effectLst/>
+                        <a:latin typeface="D2Coding" panose="020B0609020101020101" pitchFamily="49" charset="-127"/>
+                        <a:ea typeface="D2Coding" panose="020B0609020101020101" pitchFamily="49" charset="-127"/>
+                      </a:endParaRPr>
+                    </a:p>
+                  </a:txBody>
+                  <a:tcPr marL="7620" marR="7620" marT="7620" marB="0" anchor="b">
+                    <a:lnB w="12700" cap="flat" cmpd="sng" algn="ctr">
+                      <a:solidFill>
+                        <a:schemeClr val="tx1"/>
+                      </a:solidFill>
+                      <a:prstDash val="solid"/>
+                      <a:round/>
+                      <a:headEnd type="none" w="med" len="med"/>
+                      <a:tailEnd type="none" w="med" len="med"/>
+                    </a:lnB>
+                  </a:tcPr>
+                </a:tc>
+                <a:tc>
+                  <a:txBody>
+                    <a:bodyPr/>
+                    <a:lstStyle/>
+                    <a:p>
+                      <a:pPr algn="ctr" fontAlgn="b">
+                        <a:buNone/>
+                      </a:pPr>
+                      <a:r>
+                        <a:rPr lang="en-US" altLang="ko-KR" sz="1600" u="none" strike="noStrike" dirty="0">
+                          <a:effectLst/>
+                        </a:rPr>
+                        <a:t>130</a:t>
+                      </a:r>
+                      <a:endParaRPr lang="en-US" altLang="ko-KR" sz="1600" b="1" i="0" u="none" strike="noStrike" dirty="0">
+                        <a:solidFill>
+                          <a:srgbClr val="000000"/>
+                        </a:solidFill>
+                        <a:effectLst/>
+                        <a:latin typeface="D2Coding" panose="020B0609020101020101" pitchFamily="49" charset="-127"/>
+                        <a:ea typeface="D2Coding" panose="020B0609020101020101" pitchFamily="49" charset="-127"/>
+                      </a:endParaRPr>
+                    </a:p>
+                  </a:txBody>
+                  <a:tcPr marL="7620" marR="7620" marT="7620" marB="0" anchor="b">
+                    <a:lnR w="12700" cap="flat" cmpd="sng" algn="ctr">
+                      <a:solidFill>
+                        <a:schemeClr val="tx1"/>
+                      </a:solidFill>
+                      <a:prstDash val="solid"/>
+                      <a:round/>
+                      <a:headEnd type="none" w="med" len="med"/>
+                      <a:tailEnd type="none" w="med" len="med"/>
+                    </a:lnR>
+                    <a:lnB w="12700" cap="flat" cmpd="sng" algn="ctr">
+                      <a:solidFill>
+                        <a:schemeClr val="tx1"/>
+                      </a:solidFill>
+                      <a:prstDash val="solid"/>
+                      <a:round/>
+                      <a:headEnd type="none" w="med" len="med"/>
+                      <a:tailEnd type="none" w="med" len="med"/>
+                    </a:lnB>
+                  </a:tcPr>
+                </a:tc>
+                <a:extLst>
+                  <a:ext uri="{0D108BD9-81ED-4DB2-BD59-A6C34878D82A}">
+                    <a16:rowId xmlns:a16="http://schemas.microsoft.com/office/drawing/2014/main" val="160265383"/>
+                  </a:ext>
+                </a:extLst>
+              </a:tr>
+            </a:tbl>
+          </a:graphicData>
+        </a:graphic>
+      </p:graphicFrame>
+      <p:sp>
+        <p:nvSpPr>
+          <p:cNvPr id="36" name="설명선: 굽은 선 35">
+            <a:extLst>
+              <a:ext uri="{FF2B5EF4-FFF2-40B4-BE49-F238E27FC236}">
+                <a16:creationId xmlns:a16="http://schemas.microsoft.com/office/drawing/2014/main" id="{6003F766-1218-812A-A9D4-69B850E24D11}"/>
+              </a:ext>
+            </a:extLst>
+          </p:cNvPr>
+          <p:cNvSpPr/>
+          <p:nvPr/>
+        </p:nvSpPr>
+        <p:spPr>
+          <a:xfrm>
+            <a:off x="8372474" y="4406063"/>
+            <a:ext cx="3362325" cy="1471094"/>
+          </a:xfrm>
+          <a:prstGeom prst="borderCallout2">
+            <a:avLst>
+              <a:gd name="adj1" fmla="val 18750"/>
+              <a:gd name="adj2" fmla="val -8333"/>
+              <a:gd name="adj3" fmla="val 18750"/>
+              <a:gd name="adj4" fmla="val -16667"/>
+              <a:gd name="adj5" fmla="val -11515"/>
+              <a:gd name="adj6" fmla="val -34486"/>
+            </a:avLst>
+          </a:prstGeom>
+          <a:solidFill>
+            <a:schemeClr val="tx1"/>
+          </a:solidFill>
+        </p:spPr>
+        <p:style>
+          <a:lnRef idx="2">
+            <a:schemeClr val="accent1">
+              <a:shade val="15000"/>
+            </a:schemeClr>
+          </a:lnRef>
+          <a:fillRef idx="1">
+            <a:schemeClr val="accent1"/>
+          </a:fillRef>
+          <a:effectRef idx="0">
+            <a:schemeClr val="accent1"/>
+          </a:effectRef>
+          <a:fontRef idx="minor">
+            <a:schemeClr val="lt1"/>
+          </a:fontRef>
+        </p:style>
+        <p:txBody>
+          <a:bodyPr rtlCol="0" anchor="ctr"/>
+          <a:lstStyle/>
+          <a:p>
+            <a:pPr>
+              <a:lnSpc>
+                <a:spcPct val="150000"/>
+              </a:lnSpc>
+            </a:pPr>
+            <a:r>
+              <a:rPr lang="en-US" altLang="ko-KR" sz="1400" dirty="0">
+                <a:latin typeface="D2Coding" panose="020B0609020101020101" pitchFamily="49" charset="-127"/>
+                <a:ea typeface="D2Coding" panose="020B0609020101020101" pitchFamily="49" charset="-127"/>
+              </a:rPr>
+              <a:t>Naïve Bayes</a:t>
+            </a:r>
+            <a:r>
+              <a:rPr lang="ko-KR" altLang="en-US" sz="1400" dirty="0">
+                <a:latin typeface="D2Coding" panose="020B0609020101020101" pitchFamily="49" charset="-127"/>
+                <a:ea typeface="D2Coding" panose="020B0609020101020101" pitchFamily="49" charset="-127"/>
+              </a:rPr>
+              <a:t> 알고리즘으로 엑셀과</a:t>
+            </a:r>
+            <a:r>
+              <a:rPr lang="en-US" altLang="ko-KR" sz="1400" dirty="0">
+                <a:latin typeface="D2Coding" panose="020B0609020101020101" pitchFamily="49" charset="-127"/>
+                <a:ea typeface="D2Coding" panose="020B0609020101020101" pitchFamily="49" charset="-127"/>
+              </a:rPr>
+              <a:t> scikit-learn API</a:t>
+            </a:r>
+            <a:r>
+              <a:rPr lang="ko-KR" altLang="en-US" sz="1400" dirty="0">
+                <a:latin typeface="D2Coding" panose="020B0609020101020101" pitchFamily="49" charset="-127"/>
+                <a:ea typeface="D2Coding" panose="020B0609020101020101" pitchFamily="49" charset="-127"/>
+              </a:rPr>
+              <a:t>를 사용하여 새로운 </a:t>
+            </a:r>
+            <a:r>
+              <a:rPr lang="en-US" altLang="ko-KR" sz="1400" dirty="0">
+                <a:latin typeface="D2Coding" panose="020B0609020101020101" pitchFamily="49" charset="-127"/>
+                <a:ea typeface="D2Coding" panose="020B0609020101020101" pitchFamily="49" charset="-127"/>
+              </a:rPr>
+              <a:t>sample</a:t>
+            </a:r>
+            <a:r>
+              <a:rPr lang="ko-KR" altLang="en-US" sz="1400" dirty="0">
+                <a:latin typeface="D2Coding" panose="020B0609020101020101" pitchFamily="49" charset="-127"/>
+                <a:ea typeface="D2Coding" panose="020B0609020101020101" pitchFamily="49" charset="-127"/>
+              </a:rPr>
+              <a:t>의 성별을 분류하라</a:t>
+            </a:r>
+            <a:endParaRPr lang="ko-KR" altLang="en-US" sz="1400" dirty="0"/>
+          </a:p>
+        </p:txBody>
+      </p:sp>
+      <p:sp>
+        <p:nvSpPr>
+          <p:cNvPr id="38" name="TextBox 37">
+            <a:extLst>
+              <a:ext uri="{FF2B5EF4-FFF2-40B4-BE49-F238E27FC236}">
+                <a16:creationId xmlns:a16="http://schemas.microsoft.com/office/drawing/2014/main" id="{67A95FFE-CD9C-3402-9416-F5D0BA6A9FBD}"/>
+              </a:ext>
+            </a:extLst>
+          </p:cNvPr>
+          <p:cNvSpPr txBox="1"/>
+          <p:nvPr/>
+        </p:nvSpPr>
+        <p:spPr>
+          <a:xfrm>
+            <a:off x="1819275" y="3217521"/>
+            <a:ext cx="2962275" cy="338554"/>
+          </a:xfrm>
+          <a:prstGeom prst="rect">
+            <a:avLst/>
+          </a:prstGeom>
+          <a:noFill/>
+        </p:spPr>
+        <p:txBody>
+          <a:bodyPr wrap="square">
+            <a:spAutoFit/>
+          </a:bodyPr>
+          <a:lstStyle/>
+          <a:p>
+            <a:r>
+              <a:rPr lang="en-US" altLang="ko-KR" sz="1600" dirty="0">
+                <a:latin typeface="D2Coding" panose="020B0609020101020101" pitchFamily="49" charset="-127"/>
+                <a:ea typeface="D2Coding" panose="020B0609020101020101" pitchFamily="49" charset="-127"/>
+              </a:rPr>
+              <a:t>Stratified random sample</a:t>
+            </a:r>
+            <a:endParaRPr lang="ko-KR" altLang="en-US" sz="1600" dirty="0">
+              <a:latin typeface="D2Coding" panose="020B0609020101020101" pitchFamily="49" charset="-127"/>
+              <a:ea typeface="D2Coding" panose="020B0609020101020101" pitchFamily="49" charset="-127"/>
+            </a:endParaRPr>
+          </a:p>
+        </p:txBody>
+      </p:sp>
+      <p:sp>
+        <p:nvSpPr>
+          <p:cNvPr id="39" name="TextBox 38">
+            <a:extLst>
+              <a:ext uri="{FF2B5EF4-FFF2-40B4-BE49-F238E27FC236}">
+                <a16:creationId xmlns:a16="http://schemas.microsoft.com/office/drawing/2014/main" id="{A655DC5A-C8E6-16E3-917E-CAD5BFE18B1B}"/>
+              </a:ext>
+            </a:extLst>
+          </p:cNvPr>
+          <p:cNvSpPr txBox="1"/>
+          <p:nvPr/>
+        </p:nvSpPr>
+        <p:spPr>
+          <a:xfrm>
+            <a:off x="7643293" y="3223004"/>
+            <a:ext cx="1691207" cy="338554"/>
+          </a:xfrm>
+          <a:prstGeom prst="rect">
+            <a:avLst/>
+          </a:prstGeom>
+          <a:noFill/>
+        </p:spPr>
+        <p:txBody>
+          <a:bodyPr wrap="square">
+            <a:spAutoFit/>
+          </a:bodyPr>
+          <a:lstStyle/>
+          <a:p>
+            <a:r>
+              <a:rPr lang="en-US" altLang="ko-KR" sz="1600" dirty="0">
+                <a:latin typeface="D2Coding" panose="020B0609020101020101" pitchFamily="49" charset="-127"/>
+                <a:ea typeface="D2Coding" panose="020B0609020101020101" pitchFamily="49" charset="-127"/>
+              </a:rPr>
+              <a:t>Unseen data</a:t>
+            </a:r>
+            <a:endParaRPr lang="ko-KR" altLang="en-US" sz="1600" dirty="0">
+              <a:latin typeface="D2Coding" panose="020B0609020101020101" pitchFamily="49" charset="-127"/>
+              <a:ea typeface="D2Coding" panose="020B0609020101020101" pitchFamily="49" charset="-127"/>
+            </a:endParaRPr>
+          </a:p>
+        </p:txBody>
+      </p:sp>
+    </p:spTree>
+    <p:extLst>
+      <p:ext uri="{BB962C8B-B14F-4D97-AF65-F5344CB8AC3E}">
+        <p14:creationId xmlns:p14="http://schemas.microsoft.com/office/powerpoint/2010/main" val="143517777"/>
+      </p:ext>
+    </p:extLst>
+  </p:cSld>
+  <p:clrMapOvr>
+    <a:masterClrMapping/>
+  </p:clrMapOvr>
+</p:sld>
+</file>
+
+<file path=ppt/slides/slide9.xml><?xml version="1.0" encoding="utf-8"?>
+<p:sld xmlns:a="http://schemas.openxmlformats.org/drawingml/2006/main" xmlns:r="http://schemas.openxmlformats.org/officeDocument/2006/relationships" xmlns:p="http://schemas.openxmlformats.org/presentationml/2006/main">
+  <p:cSld>
+    <p:spTree>
+      <p:nvGrpSpPr>
+        <p:cNvPr id="1" name="">
+          <a:extLst>
+            <a:ext uri="{FF2B5EF4-FFF2-40B4-BE49-F238E27FC236}">
+              <a16:creationId xmlns:a16="http://schemas.microsoft.com/office/drawing/2014/main" id="{7A063FB0-E7FB-3AEB-DCCD-669F3E94F98F}"/>
+            </a:ext>
+          </a:extLst>
+        </p:cNvPr>
+        <p:cNvGrpSpPr/>
+        <p:nvPr/>
+      </p:nvGrpSpPr>
+      <p:grpSpPr>
+        <a:xfrm>
+          <a:off x="0" y="0"/>
+          <a:ext cx="0" cy="0"/>
+          <a:chOff x="0" y="0"/>
+          <a:chExt cx="0" cy="0"/>
+        </a:xfrm>
+      </p:grpSpPr>
+      <p:sp>
+        <p:nvSpPr>
+          <p:cNvPr id="4" name="슬라이드 번호 개체 틀 3">
+            <a:extLst>
+              <a:ext uri="{FF2B5EF4-FFF2-40B4-BE49-F238E27FC236}">
+                <a16:creationId xmlns:a16="http://schemas.microsoft.com/office/drawing/2014/main" id="{5198B9FB-1842-4F32-E8B7-C4ACC43D5590}"/>
+              </a:ext>
+            </a:extLst>
+          </p:cNvPr>
+          <p:cNvSpPr>
+            <a:spLocks noGrp="1"/>
+          </p:cNvSpPr>
+          <p:nvPr>
+            <p:ph type="sldNum" sz="quarter" idx="12"/>
+          </p:nvPr>
+        </p:nvSpPr>
+        <p:spPr>
+          <a:xfrm>
+            <a:off x="10514011" y="6036261"/>
+            <a:ext cx="753545" cy="365125"/>
+          </a:xfrm>
+        </p:spPr>
+        <p:txBody>
+          <a:bodyPr/>
+          <a:lstStyle/>
+          <a:p>
+            <a:fld id="{D57F1E4F-1CFF-5643-939E-217C01CDF565}" type="slidenum">
+              <a:rPr lang="en-US" smtClean="0"/>
+              <a:pPr/>
+              <a:t>9</a:t>
+            </a:fld>
+            <a:endParaRPr lang="en-US" dirty="0"/>
+          </a:p>
+        </p:txBody>
+      </p:sp>
+      <p:sp>
+        <p:nvSpPr>
+          <p:cNvPr id="3" name="제목 1">
+            <a:extLst>
+              <a:ext uri="{FF2B5EF4-FFF2-40B4-BE49-F238E27FC236}">
+                <a16:creationId xmlns:a16="http://schemas.microsoft.com/office/drawing/2014/main" id="{B76CDD5B-F7FB-AA49-3923-6A569A0A379E}"/>
+              </a:ext>
+            </a:extLst>
+          </p:cNvPr>
+          <p:cNvSpPr txBox="1">
+            <a:spLocks/>
+          </p:cNvSpPr>
+          <p:nvPr/>
+        </p:nvSpPr>
+        <p:spPr>
+          <a:xfrm>
+            <a:off x="475645" y="481983"/>
+            <a:ext cx="10353762" cy="766439"/>
+          </a:xfrm>
+          <a:prstGeom prst="rect">
+            <a:avLst/>
+          </a:prstGeom>
+        </p:spPr>
+        <p:txBody>
+          <a:bodyPr vert="horz" lIns="91440" tIns="45720" rIns="91440" bIns="45720" rtlCol="0" anchor="ctr">
+            <a:normAutofit/>
+          </a:bodyPr>
+          <a:lstStyle>
+            <a:lvl1pPr algn="ctr" defTabSz="914400" rtl="0" eaLnBrk="1" latinLnBrk="1" hangingPunct="1">
+              <a:lnSpc>
+                <a:spcPct val="90000"/>
+              </a:lnSpc>
+              <a:spcBef>
+                <a:spcPct val="0"/>
+              </a:spcBef>
+              <a:buNone/>
+              <a:defRPr sz="3200" kern="1200" cap="all" baseline="0">
+                <a:solidFill>
+                  <a:schemeClr val="tx1"/>
+                </a:solidFill>
+                <a:effectLst/>
+                <a:latin typeface="Batang" panose="02030600000101010101" pitchFamily="18" charset="-127"/>
+                <a:ea typeface="Batang" panose="02030600000101010101" pitchFamily="18" charset="-127"/>
+                <a:cs typeface="+mj-cs"/>
+              </a:defRPr>
+            </a:lvl1pPr>
+          </a:lstStyle>
+          <a:p>
+            <a:pPr algn="l"/>
+            <a:r>
+              <a:rPr lang="en-US" altLang="ko-KR" sz="2800" cap="none" dirty="0">
+                <a:solidFill>
+                  <a:schemeClr val="bg2">
+                    <a:lumMod val="25000"/>
+                  </a:schemeClr>
+                </a:solidFill>
+                <a:latin typeface="D2Coding" panose="020B0609020101020101" pitchFamily="49" charset="-127"/>
+                <a:ea typeface="D2Coding" panose="020B0609020101020101" pitchFamily="49" charset="-127"/>
+                <a:cs typeface="Segoe UI Light" panose="020B0502040204020203" pitchFamily="34" charset="0"/>
+              </a:rPr>
+              <a:t>Task 4</a:t>
+            </a:r>
+            <a:endParaRPr lang="ko-KR" altLang="en-US" sz="2800" cap="none" dirty="0">
+              <a:solidFill>
+                <a:schemeClr val="bg2">
+                  <a:lumMod val="25000"/>
+                </a:schemeClr>
+              </a:solidFill>
+              <a:latin typeface="D2Coding" panose="020B0609020101020101" pitchFamily="49" charset="-127"/>
+              <a:ea typeface="D2Coding" panose="020B0609020101020101" pitchFamily="49" charset="-127"/>
+              <a:cs typeface="Segoe UI Light" panose="020B0502040204020203" pitchFamily="34" charset="0"/>
+            </a:endParaRPr>
+          </a:p>
+        </p:txBody>
+      </p:sp>
+      <p:pic>
+        <p:nvPicPr>
+          <p:cNvPr id="7" name="그림 6">
+            <a:extLst>
+              <a:ext uri="{FF2B5EF4-FFF2-40B4-BE49-F238E27FC236}">
+                <a16:creationId xmlns:a16="http://schemas.microsoft.com/office/drawing/2014/main" id="{DE479B33-1D05-E40E-CB97-B7020D9F6EC3}"/>
+              </a:ext>
+            </a:extLst>
+          </p:cNvPr>
+          <p:cNvPicPr>
+            <a:picLocks noChangeAspect="1"/>
+          </p:cNvPicPr>
+          <p:nvPr/>
+        </p:nvPicPr>
+        <p:blipFill>
+          <a:blip r:embed="rId2"/>
+          <a:stretch>
+            <a:fillRect/>
+          </a:stretch>
+        </p:blipFill>
+        <p:spPr>
+          <a:xfrm>
+            <a:off x="475645" y="2037438"/>
+            <a:ext cx="11040080" cy="2783123"/>
+          </a:xfrm>
+          <a:prstGeom prst="rect">
+            <a:avLst/>
+          </a:prstGeom>
+        </p:spPr>
+      </p:pic>
+    </p:spTree>
+    <p:extLst>
+      <p:ext uri="{BB962C8B-B14F-4D97-AF65-F5344CB8AC3E}">
+        <p14:creationId xmlns:p14="http://schemas.microsoft.com/office/powerpoint/2010/main" val="2274985940"/>
+      </p:ext>
+    </p:extLst>
+  </p:cSld>
+  <p:clrMapOvr>
+    <a:masterClrMapping/>
+  </p:clrMapOvr>
 </p:sld>
 </file>
 

--- a/01_ML.pptx
+++ b/01_ML.pptx
@@ -5,10 +5,10 @@
     <p:sldMasterId id="2147483660" r:id="rId1"/>
   </p:sldMasterIdLst>
   <p:notesMasterIdLst>
-    <p:notesMasterId r:id="rId11"/>
+    <p:notesMasterId r:id="rId13"/>
   </p:notesMasterIdLst>
   <p:handoutMasterIdLst>
-    <p:handoutMasterId r:id="rId12"/>
+    <p:handoutMasterId r:id="rId14"/>
   </p:handoutMasterIdLst>
   <p:sldIdLst>
     <p:sldId id="256" r:id="rId2"/>
@@ -19,7 +19,9 @@
     <p:sldId id="1141" r:id="rId7"/>
     <p:sldId id="1143" r:id="rId8"/>
     <p:sldId id="1144" r:id="rId9"/>
-    <p:sldId id="1145" r:id="rId10"/>
+    <p:sldId id="1147" r:id="rId10"/>
+    <p:sldId id="1146" r:id="rId11"/>
+    <p:sldId id="1145" r:id="rId12"/>
   </p:sldIdLst>
   <p:sldSz cx="12192000" cy="6858000"/>
   <p:notesSz cx="6858000" cy="9144000"/>
@@ -135,6 +137,8 @@
             <p14:sldId id="1141"/>
             <p14:sldId id="1143"/>
             <p14:sldId id="1144"/>
+            <p14:sldId id="1147"/>
+            <p14:sldId id="1146"/>
             <p14:sldId id="1145"/>
           </p14:sldIdLst>
         </p14:section>
@@ -2999,6 +3003,531 @@
     <p:extLst>
       <p:ext uri="{BB962C8B-B14F-4D97-AF65-F5344CB8AC3E}">
         <p14:creationId xmlns:p14="http://schemas.microsoft.com/office/powerpoint/2010/main" val="2471807738"/>
+      </p:ext>
+    </p:extLst>
+  </p:cSld>
+  <p:clrMapOvr>
+    <a:masterClrMapping/>
+  </p:clrMapOvr>
+</p:sld>
+</file>
+
+<file path=ppt/slides/slide10.xml><?xml version="1.0" encoding="utf-8"?>
+<p:sld xmlns:a="http://schemas.openxmlformats.org/drawingml/2006/main" xmlns:r="http://schemas.openxmlformats.org/officeDocument/2006/relationships" xmlns:p="http://schemas.openxmlformats.org/presentationml/2006/main">
+  <p:cSld>
+    <p:spTree>
+      <p:nvGrpSpPr>
+        <p:cNvPr id="1" name="">
+          <a:extLst>
+            <a:ext uri="{FF2B5EF4-FFF2-40B4-BE49-F238E27FC236}">
+              <a16:creationId xmlns:a16="http://schemas.microsoft.com/office/drawing/2014/main" id="{3640FBC5-61A6-064C-E995-C04B95A55163}"/>
+            </a:ext>
+          </a:extLst>
+        </p:cNvPr>
+        <p:cNvGrpSpPr/>
+        <p:nvPr/>
+      </p:nvGrpSpPr>
+      <p:grpSpPr>
+        <a:xfrm>
+          <a:off x="0" y="0"/>
+          <a:ext cx="0" cy="0"/>
+          <a:chOff x="0" y="0"/>
+          <a:chExt cx="0" cy="0"/>
+        </a:xfrm>
+      </p:grpSpPr>
+      <p:sp>
+        <p:nvSpPr>
+          <p:cNvPr id="4" name="슬라이드 번호 개체 틀 3">
+            <a:extLst>
+              <a:ext uri="{FF2B5EF4-FFF2-40B4-BE49-F238E27FC236}">
+                <a16:creationId xmlns:a16="http://schemas.microsoft.com/office/drawing/2014/main" id="{89F175F6-CA2E-772B-52B9-9ECD751F4A21}"/>
+              </a:ext>
+            </a:extLst>
+          </p:cNvPr>
+          <p:cNvSpPr>
+            <a:spLocks noGrp="1"/>
+          </p:cNvSpPr>
+          <p:nvPr>
+            <p:ph type="sldNum" sz="quarter" idx="12"/>
+          </p:nvPr>
+        </p:nvSpPr>
+        <p:spPr>
+          <a:xfrm>
+            <a:off x="10514011" y="6036261"/>
+            <a:ext cx="753545" cy="365125"/>
+          </a:xfrm>
+        </p:spPr>
+        <p:txBody>
+          <a:bodyPr/>
+          <a:lstStyle/>
+          <a:p>
+            <a:fld id="{D57F1E4F-1CFF-5643-939E-217C01CDF565}" type="slidenum">
+              <a:rPr lang="en-US" smtClean="0"/>
+              <a:pPr/>
+              <a:t>10</a:t>
+            </a:fld>
+            <a:endParaRPr lang="en-US" dirty="0"/>
+          </a:p>
+        </p:txBody>
+      </p:sp>
+      <p:sp>
+        <p:nvSpPr>
+          <p:cNvPr id="3" name="제목 1">
+            <a:extLst>
+              <a:ext uri="{FF2B5EF4-FFF2-40B4-BE49-F238E27FC236}">
+                <a16:creationId xmlns:a16="http://schemas.microsoft.com/office/drawing/2014/main" id="{EA14900B-7995-DBD1-1F56-03A9FD89F33A}"/>
+              </a:ext>
+            </a:extLst>
+          </p:cNvPr>
+          <p:cNvSpPr txBox="1">
+            <a:spLocks/>
+          </p:cNvSpPr>
+          <p:nvPr/>
+        </p:nvSpPr>
+        <p:spPr>
+          <a:xfrm>
+            <a:off x="475645" y="481983"/>
+            <a:ext cx="10353762" cy="766439"/>
+          </a:xfrm>
+          <a:prstGeom prst="rect">
+            <a:avLst/>
+          </a:prstGeom>
+        </p:spPr>
+        <p:txBody>
+          <a:bodyPr vert="horz" lIns="91440" tIns="45720" rIns="91440" bIns="45720" rtlCol="0" anchor="ctr">
+            <a:normAutofit/>
+          </a:bodyPr>
+          <a:lstStyle>
+            <a:lvl1pPr algn="ctr" defTabSz="914400" rtl="0" eaLnBrk="1" latinLnBrk="1" hangingPunct="1">
+              <a:lnSpc>
+                <a:spcPct val="90000"/>
+              </a:lnSpc>
+              <a:spcBef>
+                <a:spcPct val="0"/>
+              </a:spcBef>
+              <a:buNone/>
+              <a:defRPr sz="3200" kern="1200" cap="all" baseline="0">
+                <a:solidFill>
+                  <a:schemeClr val="tx1"/>
+                </a:solidFill>
+                <a:effectLst/>
+                <a:latin typeface="Batang" panose="02030600000101010101" pitchFamily="18" charset="-127"/>
+                <a:ea typeface="Batang" panose="02030600000101010101" pitchFamily="18" charset="-127"/>
+                <a:cs typeface="+mj-cs"/>
+              </a:defRPr>
+            </a:lvl1pPr>
+          </a:lstStyle>
+          <a:p>
+            <a:pPr algn="l"/>
+            <a:r>
+              <a:rPr lang="en-US" altLang="ko-KR" sz="2800" cap="none" dirty="0">
+                <a:solidFill>
+                  <a:schemeClr val="bg2">
+                    <a:lumMod val="25000"/>
+                  </a:schemeClr>
+                </a:solidFill>
+                <a:latin typeface="D2Coding" panose="020B0609020101020101" pitchFamily="49" charset="-127"/>
+                <a:ea typeface="D2Coding" panose="020B0609020101020101" pitchFamily="49" charset="-127"/>
+                <a:cs typeface="Segoe UI Light" panose="020B0502040204020203" pitchFamily="34" charset="0"/>
+              </a:rPr>
+              <a:t>Task 4</a:t>
+            </a:r>
+            <a:endParaRPr lang="ko-KR" altLang="en-US" sz="2800" cap="none" dirty="0">
+              <a:solidFill>
+                <a:schemeClr val="bg2">
+                  <a:lumMod val="25000"/>
+                </a:schemeClr>
+              </a:solidFill>
+              <a:latin typeface="D2Coding" panose="020B0609020101020101" pitchFamily="49" charset="-127"/>
+              <a:ea typeface="D2Coding" panose="020B0609020101020101" pitchFamily="49" charset="-127"/>
+              <a:cs typeface="Segoe UI Light" panose="020B0502040204020203" pitchFamily="34" charset="0"/>
+            </a:endParaRPr>
+          </a:p>
+        </p:txBody>
+      </p:sp>
+      <p:pic>
+        <p:nvPicPr>
+          <p:cNvPr id="5" name="그림 4">
+            <a:extLst>
+              <a:ext uri="{FF2B5EF4-FFF2-40B4-BE49-F238E27FC236}">
+                <a16:creationId xmlns:a16="http://schemas.microsoft.com/office/drawing/2014/main" id="{6EEFFA98-C40E-81E0-27EB-754AFEFDEEAD}"/>
+              </a:ext>
+            </a:extLst>
+          </p:cNvPr>
+          <p:cNvPicPr>
+            <a:picLocks noChangeAspect="1"/>
+          </p:cNvPicPr>
+          <p:nvPr/>
+        </p:nvPicPr>
+        <p:blipFill>
+          <a:blip r:embed="rId2"/>
+          <a:stretch>
+            <a:fillRect/>
+          </a:stretch>
+        </p:blipFill>
+        <p:spPr>
+          <a:xfrm>
+            <a:off x="547687" y="2678011"/>
+            <a:ext cx="11096625" cy="2797377"/>
+          </a:xfrm>
+          <a:prstGeom prst="rect">
+            <a:avLst/>
+          </a:prstGeom>
+        </p:spPr>
+      </p:pic>
+      <p:sp>
+        <p:nvSpPr>
+          <p:cNvPr id="8" name="TextBox 7">
+            <a:extLst>
+              <a:ext uri="{FF2B5EF4-FFF2-40B4-BE49-F238E27FC236}">
+                <a16:creationId xmlns:a16="http://schemas.microsoft.com/office/drawing/2014/main" id="{838D2002-0AC6-F909-3C83-92862CAD16F1}"/>
+              </a:ext>
+            </a:extLst>
+          </p:cNvPr>
+          <p:cNvSpPr txBox="1"/>
+          <p:nvPr/>
+        </p:nvSpPr>
+        <p:spPr>
+          <a:xfrm>
+            <a:off x="475644" y="1242784"/>
+            <a:ext cx="11096625" cy="793166"/>
+          </a:xfrm>
+          <a:prstGeom prst="rect">
+            <a:avLst/>
+          </a:prstGeom>
+          <a:noFill/>
+        </p:spPr>
+        <p:txBody>
+          <a:bodyPr wrap="square">
+            <a:spAutoFit/>
+          </a:bodyPr>
+          <a:lstStyle/>
+          <a:p>
+            <a:pPr>
+              <a:lnSpc>
+                <a:spcPct val="150000"/>
+              </a:lnSpc>
+            </a:pPr>
+            <a:r>
+              <a:rPr lang="ko-KR" altLang="en-US" sz="1600" dirty="0">
+                <a:latin typeface="D2Coding" panose="020B0609020101020101" pitchFamily="49" charset="-127"/>
+                <a:ea typeface="D2Coding" panose="020B0609020101020101" pitchFamily="49" charset="-127"/>
+              </a:rPr>
+              <a:t>데이터 전처리를 할 때는 남성과 여성을 다 합친 전체 데이터를 기준으로 평균 </a:t>
+            </a:r>
+            <a:r>
+              <a:rPr lang="en-US" altLang="ko-KR" sz="1600" dirty="0">
+                <a:latin typeface="D2Coding" panose="020B0609020101020101" pitchFamily="49" charset="-127"/>
+                <a:ea typeface="D2Coding" panose="020B0609020101020101" pitchFamily="49" charset="-127"/>
+              </a:rPr>
+              <a:t>0, </a:t>
+            </a:r>
+            <a:r>
+              <a:rPr lang="ko-KR" altLang="en-US" sz="1600" dirty="0">
+                <a:latin typeface="D2Coding" panose="020B0609020101020101" pitchFamily="49" charset="-127"/>
+                <a:ea typeface="D2Coding" panose="020B0609020101020101" pitchFamily="49" charset="-127"/>
+              </a:rPr>
+              <a:t>분산 </a:t>
+            </a:r>
+            <a:r>
+              <a:rPr lang="en-US" altLang="ko-KR" sz="1600" dirty="0">
+                <a:latin typeface="D2Coding" panose="020B0609020101020101" pitchFamily="49" charset="-127"/>
+                <a:ea typeface="D2Coding" panose="020B0609020101020101" pitchFamily="49" charset="-127"/>
+              </a:rPr>
+              <a:t>1</a:t>
+            </a:r>
+            <a:r>
+              <a:rPr lang="ko-KR" altLang="en-US" sz="1600" dirty="0">
+                <a:latin typeface="D2Coding" panose="020B0609020101020101" pitchFamily="49" charset="-127"/>
+                <a:ea typeface="D2Coding" panose="020B0609020101020101" pitchFamily="49" charset="-127"/>
+              </a:rPr>
+              <a:t>를 만들면 되며 아래 그림은 </a:t>
+            </a:r>
+            <a:r>
+              <a:rPr lang="en-US" altLang="ko-KR" sz="1600" dirty="0">
+                <a:latin typeface="D2Coding" panose="020B0609020101020101" pitchFamily="49" charset="-127"/>
+                <a:ea typeface="D2Coding" panose="020B0609020101020101" pitchFamily="49" charset="-127"/>
+              </a:rPr>
+              <a:t>Min-Max</a:t>
+            </a:r>
+            <a:r>
+              <a:rPr lang="ko-KR" altLang="en-US" sz="1600" dirty="0">
+                <a:latin typeface="D2Coding" panose="020B0609020101020101" pitchFamily="49" charset="-127"/>
+                <a:ea typeface="D2Coding" panose="020B0609020101020101" pitchFamily="49" charset="-127"/>
+              </a:rPr>
+              <a:t>로 자료를 </a:t>
+            </a:r>
+            <a:r>
+              <a:rPr lang="en-US" altLang="ko-KR" sz="1600" dirty="0">
+                <a:latin typeface="D2Coding" panose="020B0609020101020101" pitchFamily="49" charset="-127"/>
+                <a:ea typeface="D2Coding" panose="020B0609020101020101" pitchFamily="49" charset="-127"/>
+              </a:rPr>
+              <a:t>scaling</a:t>
+            </a:r>
+            <a:r>
+              <a:rPr lang="ko-KR" altLang="en-US" sz="1600" dirty="0">
+                <a:latin typeface="D2Coding" panose="020B0609020101020101" pitchFamily="49" charset="-127"/>
+                <a:ea typeface="D2Coding" panose="020B0609020101020101" pitchFamily="49" charset="-127"/>
+              </a:rPr>
+              <a:t>한 것임</a:t>
+            </a:r>
+          </a:p>
+        </p:txBody>
+      </p:sp>
+    </p:spTree>
+    <p:extLst>
+      <p:ext uri="{BB962C8B-B14F-4D97-AF65-F5344CB8AC3E}">
+        <p14:creationId xmlns:p14="http://schemas.microsoft.com/office/powerpoint/2010/main" val="1731133401"/>
+      </p:ext>
+    </p:extLst>
+  </p:cSld>
+  <p:clrMapOvr>
+    <a:masterClrMapping/>
+  </p:clrMapOvr>
+</p:sld>
+</file>
+
+<file path=ppt/slides/slide11.xml><?xml version="1.0" encoding="utf-8"?>
+<p:sld xmlns:a="http://schemas.openxmlformats.org/drawingml/2006/main" xmlns:r="http://schemas.openxmlformats.org/officeDocument/2006/relationships" xmlns:p="http://schemas.openxmlformats.org/presentationml/2006/main">
+  <p:cSld>
+    <p:spTree>
+      <p:nvGrpSpPr>
+        <p:cNvPr id="1" name="">
+          <a:extLst>
+            <a:ext uri="{FF2B5EF4-FFF2-40B4-BE49-F238E27FC236}">
+              <a16:creationId xmlns:a16="http://schemas.microsoft.com/office/drawing/2014/main" id="{7A063FB0-E7FB-3AEB-DCCD-669F3E94F98F}"/>
+            </a:ext>
+          </a:extLst>
+        </p:cNvPr>
+        <p:cNvGrpSpPr/>
+        <p:nvPr/>
+      </p:nvGrpSpPr>
+      <p:grpSpPr>
+        <a:xfrm>
+          <a:off x="0" y="0"/>
+          <a:ext cx="0" cy="0"/>
+          <a:chOff x="0" y="0"/>
+          <a:chExt cx="0" cy="0"/>
+        </a:xfrm>
+      </p:grpSpPr>
+      <p:sp>
+        <p:nvSpPr>
+          <p:cNvPr id="4" name="슬라이드 번호 개체 틀 3">
+            <a:extLst>
+              <a:ext uri="{FF2B5EF4-FFF2-40B4-BE49-F238E27FC236}">
+                <a16:creationId xmlns:a16="http://schemas.microsoft.com/office/drawing/2014/main" id="{5198B9FB-1842-4F32-E8B7-C4ACC43D5590}"/>
+              </a:ext>
+            </a:extLst>
+          </p:cNvPr>
+          <p:cNvSpPr>
+            <a:spLocks noGrp="1"/>
+          </p:cNvSpPr>
+          <p:nvPr>
+            <p:ph type="sldNum" sz="quarter" idx="12"/>
+          </p:nvPr>
+        </p:nvSpPr>
+        <p:spPr>
+          <a:xfrm>
+            <a:off x="10514011" y="6036261"/>
+            <a:ext cx="753545" cy="365125"/>
+          </a:xfrm>
+        </p:spPr>
+        <p:txBody>
+          <a:bodyPr/>
+          <a:lstStyle/>
+          <a:p>
+            <a:fld id="{D57F1E4F-1CFF-5643-939E-217C01CDF565}" type="slidenum">
+              <a:rPr lang="en-US" smtClean="0"/>
+              <a:pPr/>
+              <a:t>11</a:t>
+            </a:fld>
+            <a:endParaRPr lang="en-US" dirty="0"/>
+          </a:p>
+        </p:txBody>
+      </p:sp>
+      <p:sp>
+        <p:nvSpPr>
+          <p:cNvPr id="3" name="제목 1">
+            <a:extLst>
+              <a:ext uri="{FF2B5EF4-FFF2-40B4-BE49-F238E27FC236}">
+                <a16:creationId xmlns:a16="http://schemas.microsoft.com/office/drawing/2014/main" id="{B76CDD5B-F7FB-AA49-3923-6A569A0A379E}"/>
+              </a:ext>
+            </a:extLst>
+          </p:cNvPr>
+          <p:cNvSpPr txBox="1">
+            <a:spLocks/>
+          </p:cNvSpPr>
+          <p:nvPr/>
+        </p:nvSpPr>
+        <p:spPr>
+          <a:xfrm>
+            <a:off x="475645" y="481983"/>
+            <a:ext cx="10353762" cy="766439"/>
+          </a:xfrm>
+          <a:prstGeom prst="rect">
+            <a:avLst/>
+          </a:prstGeom>
+        </p:spPr>
+        <p:txBody>
+          <a:bodyPr vert="horz" lIns="91440" tIns="45720" rIns="91440" bIns="45720" rtlCol="0" anchor="ctr">
+            <a:normAutofit/>
+          </a:bodyPr>
+          <a:lstStyle>
+            <a:lvl1pPr algn="ctr" defTabSz="914400" rtl="0" eaLnBrk="1" latinLnBrk="1" hangingPunct="1">
+              <a:lnSpc>
+                <a:spcPct val="90000"/>
+              </a:lnSpc>
+              <a:spcBef>
+                <a:spcPct val="0"/>
+              </a:spcBef>
+              <a:buNone/>
+              <a:defRPr sz="3200" kern="1200" cap="all" baseline="0">
+                <a:solidFill>
+                  <a:schemeClr val="tx1"/>
+                </a:solidFill>
+                <a:effectLst/>
+                <a:latin typeface="Batang" panose="02030600000101010101" pitchFamily="18" charset="-127"/>
+                <a:ea typeface="Batang" panose="02030600000101010101" pitchFamily="18" charset="-127"/>
+                <a:cs typeface="+mj-cs"/>
+              </a:defRPr>
+            </a:lvl1pPr>
+          </a:lstStyle>
+          <a:p>
+            <a:pPr algn="l"/>
+            <a:r>
+              <a:rPr lang="en-US" altLang="ko-KR" sz="2800" cap="none" dirty="0">
+                <a:solidFill>
+                  <a:schemeClr val="bg2">
+                    <a:lumMod val="25000"/>
+                  </a:schemeClr>
+                </a:solidFill>
+                <a:latin typeface="D2Coding" panose="020B0609020101020101" pitchFamily="49" charset="-127"/>
+                <a:ea typeface="D2Coding" panose="020B0609020101020101" pitchFamily="49" charset="-127"/>
+                <a:cs typeface="Segoe UI Light" panose="020B0502040204020203" pitchFamily="34" charset="0"/>
+              </a:rPr>
+              <a:t>Task 4</a:t>
+            </a:r>
+            <a:endParaRPr lang="ko-KR" altLang="en-US" sz="2800" cap="none" dirty="0">
+              <a:solidFill>
+                <a:schemeClr val="bg2">
+                  <a:lumMod val="25000"/>
+                </a:schemeClr>
+              </a:solidFill>
+              <a:latin typeface="D2Coding" panose="020B0609020101020101" pitchFamily="49" charset="-127"/>
+              <a:ea typeface="D2Coding" panose="020B0609020101020101" pitchFamily="49" charset="-127"/>
+              <a:cs typeface="Segoe UI Light" panose="020B0502040204020203" pitchFamily="34" charset="0"/>
+            </a:endParaRPr>
+          </a:p>
+        </p:txBody>
+      </p:sp>
+      <p:pic>
+        <p:nvPicPr>
+          <p:cNvPr id="10" name="그림 9">
+            <a:extLst>
+              <a:ext uri="{FF2B5EF4-FFF2-40B4-BE49-F238E27FC236}">
+                <a16:creationId xmlns:a16="http://schemas.microsoft.com/office/drawing/2014/main" id="{B5D730A1-1FC2-4F26-6E84-98CE14083147}"/>
+              </a:ext>
+            </a:extLst>
+          </p:cNvPr>
+          <p:cNvPicPr>
+            <a:picLocks noChangeAspect="1"/>
+          </p:cNvPicPr>
+          <p:nvPr/>
+        </p:nvPicPr>
+        <p:blipFill>
+          <a:blip r:embed="rId2"/>
+          <a:stretch>
+            <a:fillRect/>
+          </a:stretch>
+        </p:blipFill>
+        <p:spPr>
+          <a:xfrm>
+            <a:off x="1096972" y="2194781"/>
+            <a:ext cx="7102455" cy="4206605"/>
+          </a:xfrm>
+          <a:prstGeom prst="rect">
+            <a:avLst/>
+          </a:prstGeom>
+        </p:spPr>
+      </p:pic>
+      <p:sp>
+        <p:nvSpPr>
+          <p:cNvPr id="5" name="TextBox 4">
+            <a:extLst>
+              <a:ext uri="{FF2B5EF4-FFF2-40B4-BE49-F238E27FC236}">
+                <a16:creationId xmlns:a16="http://schemas.microsoft.com/office/drawing/2014/main" id="{431F6EF7-4365-6059-768B-5738EEBB3211}"/>
+              </a:ext>
+            </a:extLst>
+          </p:cNvPr>
+          <p:cNvSpPr txBox="1"/>
+          <p:nvPr/>
+        </p:nvSpPr>
+        <p:spPr>
+          <a:xfrm>
+            <a:off x="475645" y="1352269"/>
+            <a:ext cx="8773130" cy="369332"/>
+          </a:xfrm>
+          <a:prstGeom prst="rect">
+            <a:avLst/>
+          </a:prstGeom>
+          <a:noFill/>
+        </p:spPr>
+        <p:txBody>
+          <a:bodyPr wrap="square">
+            <a:spAutoFit/>
+          </a:bodyPr>
+          <a:lstStyle/>
+          <a:p>
+            <a:r>
+              <a:rPr lang="ko-KR" altLang="en-US" sz="1800" dirty="0">
+                <a:latin typeface="D2Coding" panose="020B0609020101020101" pitchFamily="49" charset="-127"/>
+                <a:ea typeface="D2Coding" panose="020B0609020101020101" pitchFamily="49" charset="-127"/>
+              </a:rPr>
+              <a:t>전체 데이터를 기준으로 평균 </a:t>
+            </a:r>
+            <a:r>
+              <a:rPr lang="en-US" altLang="ko-KR" sz="1800" dirty="0">
+                <a:latin typeface="D2Coding" panose="020B0609020101020101" pitchFamily="49" charset="-127"/>
+                <a:ea typeface="D2Coding" panose="020B0609020101020101" pitchFamily="49" charset="-127"/>
+              </a:rPr>
+              <a:t>0, </a:t>
+            </a:r>
+            <a:r>
+              <a:rPr lang="ko-KR" altLang="en-US" sz="1800" dirty="0">
+                <a:latin typeface="D2Coding" panose="020B0609020101020101" pitchFamily="49" charset="-127"/>
+                <a:ea typeface="D2Coding" panose="020B0609020101020101" pitchFamily="49" charset="-127"/>
+              </a:rPr>
+              <a:t>분산 </a:t>
+            </a:r>
+            <a:r>
+              <a:rPr lang="en-US" altLang="ko-KR" sz="1800" dirty="0">
+                <a:latin typeface="D2Coding" panose="020B0609020101020101" pitchFamily="49" charset="-127"/>
+                <a:ea typeface="D2Coding" panose="020B0609020101020101" pitchFamily="49" charset="-127"/>
+              </a:rPr>
+              <a:t>1</a:t>
+            </a:r>
+            <a:r>
+              <a:rPr lang="ko-KR" altLang="en-US" sz="1800" dirty="0">
+                <a:latin typeface="D2Coding" panose="020B0609020101020101" pitchFamily="49" charset="-127"/>
+                <a:ea typeface="D2Coding" panose="020B0609020101020101" pitchFamily="49" charset="-127"/>
+              </a:rPr>
+              <a:t>로 자료 </a:t>
+            </a:r>
+            <a:r>
+              <a:rPr lang="en-US" altLang="ko-KR" sz="1800" dirty="0">
+                <a:latin typeface="D2Coding" panose="020B0609020101020101" pitchFamily="49" charset="-127"/>
+                <a:ea typeface="D2Coding" panose="020B0609020101020101" pitchFamily="49" charset="-127"/>
+              </a:rPr>
+              <a:t>scaling</a:t>
+            </a:r>
+            <a:endParaRPr lang="ko-KR" altLang="en-US" dirty="0"/>
+          </a:p>
+        </p:txBody>
+      </p:sp>
+    </p:spTree>
+    <p:extLst>
+      <p:ext uri="{BB962C8B-B14F-4D97-AF65-F5344CB8AC3E}">
+        <p14:creationId xmlns:p14="http://schemas.microsoft.com/office/powerpoint/2010/main" val="3182483150"/>
       </p:ext>
     </p:extLst>
   </p:cSld>
@@ -9333,7 +9862,7 @@
         <p:cNvPr id="1" name="">
           <a:extLst>
             <a:ext uri="{FF2B5EF4-FFF2-40B4-BE49-F238E27FC236}">
-              <a16:creationId xmlns:a16="http://schemas.microsoft.com/office/drawing/2014/main" id="{7A063FB0-E7FB-3AEB-DCCD-669F3E94F98F}"/>
+              <a16:creationId xmlns:a16="http://schemas.microsoft.com/office/drawing/2014/main" id="{8ECCA272-18AB-D4DF-40BA-4FD3CA93CA7B}"/>
             </a:ext>
           </a:extLst>
         </p:cNvPr>
@@ -9353,7 +9882,7 @@
           <p:cNvPr id="4" name="슬라이드 번호 개체 틀 3">
             <a:extLst>
               <a:ext uri="{FF2B5EF4-FFF2-40B4-BE49-F238E27FC236}">
-                <a16:creationId xmlns:a16="http://schemas.microsoft.com/office/drawing/2014/main" id="{5198B9FB-1842-4F32-E8B7-C4ACC43D5590}"/>
+                <a16:creationId xmlns:a16="http://schemas.microsoft.com/office/drawing/2014/main" id="{3F01F5DB-E355-D5B7-C9E3-0B2DF9B65FF9}"/>
               </a:ext>
             </a:extLst>
           </p:cNvPr>
@@ -9388,7 +9917,7 @@
           <p:cNvPr id="3" name="제목 1">
             <a:extLst>
               <a:ext uri="{FF2B5EF4-FFF2-40B4-BE49-F238E27FC236}">
-                <a16:creationId xmlns:a16="http://schemas.microsoft.com/office/drawing/2014/main" id="{B76CDD5B-F7FB-AA49-3923-6A569A0A379E}"/>
+                <a16:creationId xmlns:a16="http://schemas.microsoft.com/office/drawing/2014/main" id="{2B1414A4-F3D7-4A6F-8825-1C6CD0BD4CCD}"/>
               </a:ext>
             </a:extLst>
           </p:cNvPr>
@@ -9463,7 +9992,7 @@
           <p:cNvPr id="7" name="그림 6">
             <a:extLst>
               <a:ext uri="{FF2B5EF4-FFF2-40B4-BE49-F238E27FC236}">
-                <a16:creationId xmlns:a16="http://schemas.microsoft.com/office/drawing/2014/main" id="{DE479B33-1D05-E40E-CB97-B7020D9F6EC3}"/>
+                <a16:creationId xmlns:a16="http://schemas.microsoft.com/office/drawing/2014/main" id="{1D82043F-16F6-4C70-8C52-2EE6552CB1E4}"/>
               </a:ext>
             </a:extLst>
           </p:cNvPr>
@@ -9491,7 +10020,7 @@
     </p:spTree>
     <p:extLst>
       <p:ext uri="{BB962C8B-B14F-4D97-AF65-F5344CB8AC3E}">
-        <p14:creationId xmlns:p14="http://schemas.microsoft.com/office/powerpoint/2010/main" val="2274985940"/>
+        <p14:creationId xmlns:p14="http://schemas.microsoft.com/office/powerpoint/2010/main" val="1748732642"/>
       </p:ext>
     </p:extLst>
   </p:cSld>

--- a/01_ML.pptx
+++ b/01_ML.pptx
@@ -5,10 +5,10 @@
     <p:sldMasterId id="2147483660" r:id="rId1"/>
   </p:sldMasterIdLst>
   <p:notesMasterIdLst>
-    <p:notesMasterId r:id="rId13"/>
+    <p:notesMasterId r:id="rId14"/>
   </p:notesMasterIdLst>
   <p:handoutMasterIdLst>
-    <p:handoutMasterId r:id="rId14"/>
+    <p:handoutMasterId r:id="rId15"/>
   </p:handoutMasterIdLst>
   <p:sldIdLst>
     <p:sldId id="256" r:id="rId2"/>
@@ -22,6 +22,7 @@
     <p:sldId id="1147" r:id="rId10"/>
     <p:sldId id="1146" r:id="rId11"/>
     <p:sldId id="1145" r:id="rId12"/>
+    <p:sldId id="1148" r:id="rId13"/>
   </p:sldIdLst>
   <p:sldSz cx="12192000" cy="6858000"/>
   <p:notesSz cx="6858000" cy="9144000"/>
@@ -140,6 +141,7 @@
             <p14:sldId id="1147"/>
             <p14:sldId id="1146"/>
             <p14:sldId id="1145"/>
+            <p14:sldId id="1148"/>
           </p14:sldIdLst>
         </p14:section>
         <p14:section name="자세한 정보" id="{2CC34DB2-6590-42C0-AD4B-A04C6060184E}">
@@ -3524,10 +3526,431 @@
           </a:p>
         </p:txBody>
       </p:sp>
+      <p:sp>
+        <p:nvSpPr>
+          <p:cNvPr id="6" name="TextBox 5">
+            <a:extLst>
+              <a:ext uri="{FF2B5EF4-FFF2-40B4-BE49-F238E27FC236}">
+                <a16:creationId xmlns:a16="http://schemas.microsoft.com/office/drawing/2014/main" id="{2F8E8075-31B6-651C-7AD0-DB89EF28BACD}"/>
+              </a:ext>
+            </a:extLst>
+          </p:cNvPr>
+          <p:cNvSpPr txBox="1"/>
+          <p:nvPr/>
+        </p:nvSpPr>
+        <p:spPr>
+          <a:xfrm>
+            <a:off x="8629650" y="2619375"/>
+            <a:ext cx="2435475" cy="369332"/>
+          </a:xfrm>
+          <a:prstGeom prst="rect">
+            <a:avLst/>
+          </a:prstGeom>
+          <a:noFill/>
+        </p:spPr>
+        <p:txBody>
+          <a:bodyPr wrap="none" rtlCol="0">
+            <a:spAutoFit/>
+          </a:bodyPr>
+          <a:lstStyle/>
+          <a:p>
+            <a:r>
+              <a:rPr lang="en-US" altLang="ko-KR" dirty="0">
+                <a:hlinkClick r:id="rId3"/>
+              </a:rPr>
+              <a:t>spaceship-titanic/data</a:t>
+            </a:r>
+            <a:endParaRPr lang="ko-KR" altLang="en-US" dirty="0"/>
+          </a:p>
+        </p:txBody>
+      </p:sp>
     </p:spTree>
     <p:extLst>
       <p:ext uri="{BB962C8B-B14F-4D97-AF65-F5344CB8AC3E}">
         <p14:creationId xmlns:p14="http://schemas.microsoft.com/office/powerpoint/2010/main" val="3182483150"/>
+      </p:ext>
+    </p:extLst>
+  </p:cSld>
+  <p:clrMapOvr>
+    <a:masterClrMapping/>
+  </p:clrMapOvr>
+</p:sld>
+</file>
+
+<file path=ppt/slides/slide12.xml><?xml version="1.0" encoding="utf-8"?>
+<p:sld xmlns:a="http://schemas.openxmlformats.org/drawingml/2006/main" xmlns:r="http://schemas.openxmlformats.org/officeDocument/2006/relationships" xmlns:p="http://schemas.openxmlformats.org/presentationml/2006/main">
+  <p:cSld>
+    <p:spTree>
+      <p:nvGrpSpPr>
+        <p:cNvPr id="1" name="">
+          <a:extLst>
+            <a:ext uri="{FF2B5EF4-FFF2-40B4-BE49-F238E27FC236}">
+              <a16:creationId xmlns:a16="http://schemas.microsoft.com/office/drawing/2014/main" id="{690CB778-0F8E-135E-C7C5-9A482B60EA5F}"/>
+            </a:ext>
+          </a:extLst>
+        </p:cNvPr>
+        <p:cNvGrpSpPr/>
+        <p:nvPr/>
+      </p:nvGrpSpPr>
+      <p:grpSpPr>
+        <a:xfrm>
+          <a:off x="0" y="0"/>
+          <a:ext cx="0" cy="0"/>
+          <a:chOff x="0" y="0"/>
+          <a:chExt cx="0" cy="0"/>
+        </a:xfrm>
+      </p:grpSpPr>
+      <p:sp>
+        <p:nvSpPr>
+          <p:cNvPr id="4" name="슬라이드 번호 개체 틀 3">
+            <a:extLst>
+              <a:ext uri="{FF2B5EF4-FFF2-40B4-BE49-F238E27FC236}">
+                <a16:creationId xmlns:a16="http://schemas.microsoft.com/office/drawing/2014/main" id="{A49AE7E6-59D4-3AD4-63F8-847BCE0E13AD}"/>
+              </a:ext>
+            </a:extLst>
+          </p:cNvPr>
+          <p:cNvSpPr>
+            <a:spLocks noGrp="1"/>
+          </p:cNvSpPr>
+          <p:nvPr>
+            <p:ph type="sldNum" sz="quarter" idx="12"/>
+          </p:nvPr>
+        </p:nvSpPr>
+        <p:spPr>
+          <a:xfrm>
+            <a:off x="10514011" y="6036261"/>
+            <a:ext cx="753545" cy="365125"/>
+          </a:xfrm>
+        </p:spPr>
+        <p:txBody>
+          <a:bodyPr/>
+          <a:lstStyle/>
+          <a:p>
+            <a:fld id="{D57F1E4F-1CFF-5643-939E-217C01CDF565}" type="slidenum">
+              <a:rPr lang="en-US" smtClean="0"/>
+              <a:pPr/>
+              <a:t>12</a:t>
+            </a:fld>
+            <a:endParaRPr lang="en-US" dirty="0"/>
+          </a:p>
+        </p:txBody>
+      </p:sp>
+      <p:sp>
+        <p:nvSpPr>
+          <p:cNvPr id="3" name="제목 1">
+            <a:extLst>
+              <a:ext uri="{FF2B5EF4-FFF2-40B4-BE49-F238E27FC236}">
+                <a16:creationId xmlns:a16="http://schemas.microsoft.com/office/drawing/2014/main" id="{E3896456-520A-5A75-40AD-00752BBF8528}"/>
+              </a:ext>
+            </a:extLst>
+          </p:cNvPr>
+          <p:cNvSpPr txBox="1">
+            <a:spLocks/>
+          </p:cNvSpPr>
+          <p:nvPr/>
+        </p:nvSpPr>
+        <p:spPr>
+          <a:xfrm>
+            <a:off x="475645" y="481983"/>
+            <a:ext cx="10353762" cy="766439"/>
+          </a:xfrm>
+          <a:prstGeom prst="rect">
+            <a:avLst/>
+          </a:prstGeom>
+        </p:spPr>
+        <p:txBody>
+          <a:bodyPr vert="horz" lIns="91440" tIns="45720" rIns="91440" bIns="45720" rtlCol="0" anchor="ctr">
+            <a:normAutofit/>
+          </a:bodyPr>
+          <a:lstStyle>
+            <a:lvl1pPr algn="ctr" defTabSz="914400" rtl="0" eaLnBrk="1" latinLnBrk="1" hangingPunct="1">
+              <a:lnSpc>
+                <a:spcPct val="90000"/>
+              </a:lnSpc>
+              <a:spcBef>
+                <a:spcPct val="0"/>
+              </a:spcBef>
+              <a:buNone/>
+              <a:defRPr sz="3200" kern="1200" cap="all" baseline="0">
+                <a:solidFill>
+                  <a:schemeClr val="tx1"/>
+                </a:solidFill>
+                <a:effectLst/>
+                <a:latin typeface="Batang" panose="02030600000101010101" pitchFamily="18" charset="-127"/>
+                <a:ea typeface="Batang" panose="02030600000101010101" pitchFamily="18" charset="-127"/>
+                <a:cs typeface="+mj-cs"/>
+              </a:defRPr>
+            </a:lvl1pPr>
+          </a:lstStyle>
+          <a:p>
+            <a:pPr algn="l"/>
+            <a:r>
+              <a:rPr lang="en-US" altLang="ko-KR" sz="2800" cap="none" dirty="0">
+                <a:solidFill>
+                  <a:schemeClr val="bg2">
+                    <a:lumMod val="25000"/>
+                  </a:schemeClr>
+                </a:solidFill>
+                <a:latin typeface="D2Coding" panose="020B0609020101020101" pitchFamily="49" charset="-127"/>
+                <a:ea typeface="D2Coding" panose="020B0609020101020101" pitchFamily="49" charset="-127"/>
+                <a:cs typeface="Segoe UI Light" panose="020B0502040204020203" pitchFamily="34" charset="0"/>
+              </a:rPr>
+              <a:t>Task 5</a:t>
+            </a:r>
+            <a:endParaRPr lang="ko-KR" altLang="en-US" sz="2800" cap="none" dirty="0">
+              <a:solidFill>
+                <a:schemeClr val="bg2">
+                  <a:lumMod val="25000"/>
+                </a:schemeClr>
+              </a:solidFill>
+              <a:latin typeface="D2Coding" panose="020B0609020101020101" pitchFamily="49" charset="-127"/>
+              <a:ea typeface="D2Coding" panose="020B0609020101020101" pitchFamily="49" charset="-127"/>
+              <a:cs typeface="Segoe UI Light" panose="020B0502040204020203" pitchFamily="34" charset="0"/>
+            </a:endParaRPr>
+          </a:p>
+        </p:txBody>
+      </p:sp>
+      <p:sp>
+        <p:nvSpPr>
+          <p:cNvPr id="5" name="TextBox 4">
+            <a:extLst>
+              <a:ext uri="{FF2B5EF4-FFF2-40B4-BE49-F238E27FC236}">
+                <a16:creationId xmlns:a16="http://schemas.microsoft.com/office/drawing/2014/main" id="{827FC1A6-3830-BF8B-7718-D631B78A0E0D}"/>
+              </a:ext>
+            </a:extLst>
+          </p:cNvPr>
+          <p:cNvSpPr txBox="1"/>
+          <p:nvPr/>
+        </p:nvSpPr>
+        <p:spPr>
+          <a:xfrm>
+            <a:off x="552147" y="1196721"/>
+            <a:ext cx="11087705" cy="791435"/>
+          </a:xfrm>
+          <a:prstGeom prst="rect">
+            <a:avLst/>
+          </a:prstGeom>
+          <a:noFill/>
+        </p:spPr>
+        <p:txBody>
+          <a:bodyPr wrap="square">
+            <a:spAutoFit/>
+          </a:bodyPr>
+          <a:lstStyle/>
+          <a:p>
+            <a:pPr>
+              <a:lnSpc>
+                <a:spcPct val="150000"/>
+              </a:lnSpc>
+            </a:pPr>
+            <a:r>
+              <a:rPr lang="en-US" altLang="ko-KR" sz="1600" dirty="0">
+                <a:latin typeface="D2Coding" panose="020B0609020101020101" pitchFamily="49" charset="-127"/>
+                <a:ea typeface="D2Coding" panose="020B0609020101020101" pitchFamily="49" charset="-127"/>
+              </a:rPr>
+              <a:t>Kaggle</a:t>
+            </a:r>
+            <a:r>
+              <a:rPr lang="ko-KR" altLang="en-US" sz="1600" dirty="0">
+                <a:latin typeface="D2Coding" panose="020B0609020101020101" pitchFamily="49" charset="-127"/>
+                <a:ea typeface="D2Coding" panose="020B0609020101020101" pitchFamily="49" charset="-127"/>
+              </a:rPr>
+              <a:t>의 데이터를 바탕으로 </a:t>
+            </a:r>
+            <a:r>
+              <a:rPr lang="en-US" altLang="ko-KR" sz="1600" dirty="0">
+                <a:latin typeface="D2Coding" panose="020B0609020101020101" pitchFamily="49" charset="-127"/>
+                <a:ea typeface="D2Coding" panose="020B0609020101020101" pitchFamily="49" charset="-127"/>
+              </a:rPr>
+              <a:t>Problem definition</a:t>
+            </a:r>
+            <a:r>
+              <a:rPr lang="ko-KR" altLang="en-US" sz="1600" dirty="0">
+                <a:latin typeface="D2Coding" panose="020B0609020101020101" pitchFamily="49" charset="-127"/>
+                <a:ea typeface="D2Coding" panose="020B0609020101020101" pitchFamily="49" charset="-127"/>
+              </a:rPr>
+              <a:t>과 </a:t>
+            </a:r>
+            <a:r>
+              <a:rPr lang="en-US" altLang="ko-KR" sz="1600" dirty="0">
+                <a:latin typeface="D2Coding" panose="020B0609020101020101" pitchFamily="49" charset="-127"/>
+                <a:ea typeface="D2Coding" panose="020B0609020101020101" pitchFamily="49" charset="-127"/>
+              </a:rPr>
+              <a:t>Goal</a:t>
+            </a:r>
+            <a:r>
+              <a:rPr lang="ko-KR" altLang="en-US" sz="1600" dirty="0">
+                <a:latin typeface="D2Coding" panose="020B0609020101020101" pitchFamily="49" charset="-127"/>
+                <a:ea typeface="D2Coding" panose="020B0609020101020101" pitchFamily="49" charset="-127"/>
+              </a:rPr>
+              <a:t>을 설정하고 데이터 전처리를 통해 여러 모델을 적용하여 평가하고 최적의 예측모델을 선택하라</a:t>
+            </a:r>
+            <a:r>
+              <a:rPr lang="en-US" altLang="ko-KR" sz="1600" dirty="0">
+                <a:latin typeface="D2Coding" panose="020B0609020101020101" pitchFamily="49" charset="-127"/>
+                <a:ea typeface="D2Coding" panose="020B0609020101020101" pitchFamily="49" charset="-127"/>
+              </a:rPr>
+              <a:t>(</a:t>
+            </a:r>
+            <a:r>
+              <a:rPr lang="ko-KR" altLang="en-US" sz="1600" dirty="0">
+                <a:latin typeface="D2Coding" panose="020B0609020101020101" pitchFamily="49" charset="-127"/>
+                <a:ea typeface="D2Coding" panose="020B0609020101020101" pitchFamily="49" charset="-127"/>
+              </a:rPr>
+              <a:t>모델의 평가기준과 그 이유를 설명하라</a:t>
+            </a:r>
+            <a:r>
+              <a:rPr lang="en-US" altLang="ko-KR" sz="1600" dirty="0">
+                <a:latin typeface="D2Coding" panose="020B0609020101020101" pitchFamily="49" charset="-127"/>
+                <a:ea typeface="D2Coding" panose="020B0609020101020101" pitchFamily="49" charset="-127"/>
+              </a:rPr>
+              <a:t>)</a:t>
+            </a:r>
+            <a:endParaRPr lang="ko-KR" altLang="en-US" sz="1600" dirty="0"/>
+          </a:p>
+        </p:txBody>
+      </p:sp>
+      <p:sp>
+        <p:nvSpPr>
+          <p:cNvPr id="6" name="TextBox 5">
+            <a:extLst>
+              <a:ext uri="{FF2B5EF4-FFF2-40B4-BE49-F238E27FC236}">
+                <a16:creationId xmlns:a16="http://schemas.microsoft.com/office/drawing/2014/main" id="{B9D4D7CB-FEBC-3203-84A1-0FAA59B4ABC9}"/>
+              </a:ext>
+            </a:extLst>
+          </p:cNvPr>
+          <p:cNvSpPr txBox="1"/>
+          <p:nvPr/>
+        </p:nvSpPr>
+        <p:spPr>
+          <a:xfrm>
+            <a:off x="595969" y="2518228"/>
+            <a:ext cx="3531736" cy="369332"/>
+          </a:xfrm>
+          <a:prstGeom prst="rect">
+            <a:avLst/>
+          </a:prstGeom>
+          <a:noFill/>
+        </p:spPr>
+        <p:txBody>
+          <a:bodyPr wrap="none" rtlCol="0">
+            <a:spAutoFit/>
+          </a:bodyPr>
+          <a:lstStyle/>
+          <a:p>
+            <a:r>
+              <a:rPr lang="en-US" altLang="ko-KR" dirty="0">
+                <a:latin typeface="D2Coding" panose="020B0609020101020101" pitchFamily="49" charset="-127"/>
+                <a:ea typeface="D2Coding" panose="020B0609020101020101" pitchFamily="49" charset="-127"/>
+                <a:hlinkClick r:id="rId2"/>
+              </a:rPr>
+              <a:t>Obtain spaceship-titanic/data</a:t>
+            </a:r>
+            <a:endParaRPr lang="ko-KR" altLang="en-US" dirty="0">
+              <a:latin typeface="D2Coding" panose="020B0609020101020101" pitchFamily="49" charset="-127"/>
+              <a:ea typeface="D2Coding" panose="020B0609020101020101" pitchFamily="49" charset="-127"/>
+            </a:endParaRPr>
+          </a:p>
+        </p:txBody>
+      </p:sp>
+      <p:pic>
+        <p:nvPicPr>
+          <p:cNvPr id="10242" name="Picture 2">
+            <a:extLst>
+              <a:ext uri="{FF2B5EF4-FFF2-40B4-BE49-F238E27FC236}">
+                <a16:creationId xmlns:a16="http://schemas.microsoft.com/office/drawing/2014/main" id="{43230967-4E21-E44C-308D-A23B2CABDF4C}"/>
+              </a:ext>
+            </a:extLst>
+          </p:cNvPr>
+          <p:cNvPicPr>
+            <a:picLocks noChangeAspect="1" noChangeArrowheads="1"/>
+          </p:cNvPicPr>
+          <p:nvPr/>
+        </p:nvPicPr>
+        <p:blipFill>
+          <a:blip r:embed="rId3">
+            <a:extLst>
+              <a:ext uri="{28A0092B-C50C-407E-A947-70E740481C1C}">
+                <a14:useLocalDpi xmlns:a14="http://schemas.microsoft.com/office/drawing/2010/main" val="0"/>
+              </a:ext>
+            </a:extLst>
+          </a:blip>
+          <a:srcRect/>
+          <a:stretch>
+            <a:fillRect/>
+          </a:stretch>
+        </p:blipFill>
+        <p:spPr bwMode="auto">
+          <a:xfrm>
+            <a:off x="718970" y="2929964"/>
+            <a:ext cx="4328976" cy="2164488"/>
+          </a:xfrm>
+          <a:prstGeom prst="rect">
+            <a:avLst/>
+          </a:prstGeom>
+          <a:noFill/>
+          <a:extLst>
+            <a:ext uri="{909E8E84-426E-40DD-AFC4-6F175D3DCCD1}">
+              <a14:hiddenFill xmlns:a14="http://schemas.microsoft.com/office/drawing/2010/main">
+                <a:solidFill>
+                  <a:srgbClr val="FFFFFF"/>
+                </a:solidFill>
+              </a14:hiddenFill>
+            </a:ext>
+          </a:extLst>
+        </p:spPr>
+      </p:pic>
+      <p:pic>
+        <p:nvPicPr>
+          <p:cNvPr id="10244" name="Picture 4">
+            <a:extLst>
+              <a:ext uri="{FF2B5EF4-FFF2-40B4-BE49-F238E27FC236}">
+                <a16:creationId xmlns:a16="http://schemas.microsoft.com/office/drawing/2014/main" id="{90F610BD-F639-E07B-8371-B7FFFCBC87EC}"/>
+              </a:ext>
+            </a:extLst>
+          </p:cNvPr>
+          <p:cNvPicPr>
+            <a:picLocks noChangeAspect="1" noChangeArrowheads="1"/>
+          </p:cNvPicPr>
+          <p:nvPr/>
+        </p:nvPicPr>
+        <p:blipFill>
+          <a:blip r:embed="rId4">
+            <a:extLst>
+              <a:ext uri="{28A0092B-C50C-407E-A947-70E740481C1C}">
+                <a14:useLocalDpi xmlns:a14="http://schemas.microsoft.com/office/drawing/2010/main" val="0"/>
+              </a:ext>
+            </a:extLst>
+          </a:blip>
+          <a:srcRect/>
+          <a:stretch>
+            <a:fillRect/>
+          </a:stretch>
+        </p:blipFill>
+        <p:spPr bwMode="auto">
+          <a:xfrm>
+            <a:off x="5267934" y="2092899"/>
+            <a:ext cx="4752366" cy="4679477"/>
+          </a:xfrm>
+          <a:prstGeom prst="rect">
+            <a:avLst/>
+          </a:prstGeom>
+          <a:noFill/>
+          <a:extLst>
+            <a:ext uri="{909E8E84-426E-40DD-AFC4-6F175D3DCCD1}">
+              <a14:hiddenFill xmlns:a14="http://schemas.microsoft.com/office/drawing/2010/main">
+                <a:solidFill>
+                  <a:srgbClr val="FFFFFF"/>
+                </a:solidFill>
+              </a14:hiddenFill>
+            </a:ext>
+          </a:extLst>
+        </p:spPr>
+      </p:pic>
+    </p:spTree>
+    <p:extLst>
+      <p:ext uri="{BB962C8B-B14F-4D97-AF65-F5344CB8AC3E}">
+        <p14:creationId xmlns:p14="http://schemas.microsoft.com/office/powerpoint/2010/main" val="1173766425"/>
       </p:ext>
     </p:extLst>
   </p:cSld>
